--- a/docs/commercial/business-32-ai-skill-studio/customer-package/Business32_Master_Proposal_10p.pptx
+++ b/docs/commercial/business-32-ai-skill-studio/customer-package/Business32_Master_Proposal_10p.pptx
@@ -3952,14 +3952,572 @@
       </p:sp>
       <p:sp>
         <p:nvSpPr>
-          <p:cNvPr id="7" name="TextBox 6"/>
-          <p:cNvSpPr txBox="1"/>
-          <p:nvPr/>
-        </p:nvSpPr>
-        <p:spPr>
-          <a:xfrm>
-            <a:off x="548640" y="1280160"/>
-            <a:ext cx="10972800" cy="4114800"/>
+          <p:cNvPr id="7" name="Rectangle 6"/>
+          <p:cNvSpPr/>
+          <p:nvPr/>
+        </p:nvSpPr>
+        <p:spPr>
+          <a:xfrm>
+            <a:off x="548640" y="1325880"/>
+            <a:ext cx="2606040" cy="1325880"/>
+          </a:xfrm>
+          <a:prstGeom prst="rect">
+            <a:avLst/>
+          </a:prstGeom>
+          <a:solidFill>
+            <a:srgbClr val="F5F1E7"/>
+          </a:solidFill>
+          <a:ln w="19050">
+            <a:solidFill>
+              <a:srgbClr val="2B6CB0"/>
+            </a:solidFill>
+          </a:ln>
+          <a:effectLst/>
+        </p:spPr>
+        <p:style>
+          <a:lnRef idx="1">
+            <a:schemeClr val="accent1"/>
+          </a:lnRef>
+          <a:fillRef idx="3">
+            <a:schemeClr val="accent1"/>
+          </a:fillRef>
+          <a:effectRef idx="2">
+            <a:schemeClr val="accent1"/>
+          </a:effectRef>
+          <a:fontRef idx="minor">
+            <a:schemeClr val="lt1"/>
+          </a:fontRef>
+        </p:style>
+        <p:txBody>
+          <a:bodyPr rtlCol="0" anchor="ctr"/>
+          <a:lstStyle/>
+          <a:p>
+            <a:pPr algn="ctr"/>
+          </a:p>
+        </p:txBody>
+      </p:sp>
+      <p:sp>
+        <p:nvSpPr>
+          <p:cNvPr id="8" name="TextBox 7"/>
+          <p:cNvSpPr txBox="1"/>
+          <p:nvPr/>
+        </p:nvSpPr>
+        <p:spPr>
+          <a:xfrm>
+            <a:off x="685800" y="1463040"/>
+            <a:ext cx="2331720" cy="365760"/>
+          </a:xfrm>
+          <a:prstGeom prst="rect">
+            <a:avLst/>
+          </a:prstGeom>
+          <a:noFill/>
+        </p:spPr>
+        <p:txBody>
+          <a:bodyPr wrap="none">
+            <a:spAutoFit/>
+          </a:bodyPr>
+          <a:lstStyle/>
+          <a:p>
+            <a:r>
+              <a:rPr sz="1400" b="1">
+                <a:solidFill>
+                  <a:srgbClr val="1F2933"/>
+                </a:solidFill>
+                <a:latin typeface="NanumSquareRound"/>
+              </a:rPr>
+              <a:t>개인별 AI 사용</a:t>
+            </a:r>
+          </a:p>
+        </p:txBody>
+      </p:sp>
+      <p:sp>
+        <p:nvSpPr>
+          <p:cNvPr id="9" name="TextBox 8"/>
+          <p:cNvSpPr txBox="1"/>
+          <p:nvPr/>
+        </p:nvSpPr>
+        <p:spPr>
+          <a:xfrm>
+            <a:off x="685800" y="1847088"/>
+            <a:ext cx="2331720" cy="731520"/>
+          </a:xfrm>
+          <a:prstGeom prst="rect">
+            <a:avLst/>
+          </a:prstGeom>
+          <a:noFill/>
+        </p:spPr>
+        <p:txBody>
+          <a:bodyPr wrap="none">
+            <a:spAutoFit/>
+          </a:bodyPr>
+          <a:lstStyle/>
+          <a:p>
+            <a:r>
+              <a:rPr sz="1100" b="0">
+                <a:solidFill>
+                  <a:srgbClr val="6B7280"/>
+                </a:solidFill>
+                <a:latin typeface="NanumSquareRound"/>
+              </a:rPr>
+              <a:t>팀 자산으로 축적되지 않음</a:t>
+            </a:r>
+          </a:p>
+        </p:txBody>
+      </p:sp>
+      <p:sp>
+        <p:nvSpPr>
+          <p:cNvPr id="10" name="TextBox 9"/>
+          <p:cNvSpPr txBox="1"/>
+          <p:nvPr/>
+        </p:nvSpPr>
+        <p:spPr>
+          <a:xfrm>
+            <a:off x="3200400" y="1783080"/>
+            <a:ext cx="228600" cy="457200"/>
+          </a:xfrm>
+          <a:prstGeom prst="rect">
+            <a:avLst/>
+          </a:prstGeom>
+          <a:noFill/>
+        </p:spPr>
+        <p:txBody>
+          <a:bodyPr wrap="none">
+            <a:spAutoFit/>
+          </a:bodyPr>
+          <a:lstStyle/>
+          <a:p>
+            <a:r>
+              <a:rPr sz="2000" b="1">
+                <a:solidFill>
+                  <a:srgbClr val="2B6CB0"/>
+                </a:solidFill>
+                <a:latin typeface="NanumSquareRound"/>
+              </a:rPr>
+              <a:t>→</a:t>
+            </a:r>
+          </a:p>
+        </p:txBody>
+      </p:sp>
+      <p:sp>
+        <p:nvSpPr>
+          <p:cNvPr id="11" name="Rectangle 10"/>
+          <p:cNvSpPr/>
+          <p:nvPr/>
+        </p:nvSpPr>
+        <p:spPr>
+          <a:xfrm>
+            <a:off x="3410712" y="1325880"/>
+            <a:ext cx="2606040" cy="1325880"/>
+          </a:xfrm>
+          <a:prstGeom prst="rect">
+            <a:avLst/>
+          </a:prstGeom>
+          <a:solidFill>
+            <a:srgbClr val="F5F1E7"/>
+          </a:solidFill>
+          <a:ln w="19050">
+            <a:solidFill>
+              <a:srgbClr val="2B6CB0"/>
+            </a:solidFill>
+          </a:ln>
+          <a:effectLst/>
+        </p:spPr>
+        <p:style>
+          <a:lnRef idx="1">
+            <a:schemeClr val="accent1"/>
+          </a:lnRef>
+          <a:fillRef idx="3">
+            <a:schemeClr val="accent1"/>
+          </a:fillRef>
+          <a:effectRef idx="2">
+            <a:schemeClr val="accent1"/>
+          </a:effectRef>
+          <a:fontRef idx="minor">
+            <a:schemeClr val="lt1"/>
+          </a:fontRef>
+        </p:style>
+        <p:txBody>
+          <a:bodyPr rtlCol="0" anchor="ctr"/>
+          <a:lstStyle/>
+          <a:p>
+            <a:pPr algn="ctr"/>
+          </a:p>
+        </p:txBody>
+      </p:sp>
+      <p:sp>
+        <p:nvSpPr>
+          <p:cNvPr id="12" name="TextBox 11"/>
+          <p:cNvSpPr txBox="1"/>
+          <p:nvPr/>
+        </p:nvSpPr>
+        <p:spPr>
+          <a:xfrm>
+            <a:off x="3547872" y="1463040"/>
+            <a:ext cx="2331720" cy="365760"/>
+          </a:xfrm>
+          <a:prstGeom prst="rect">
+            <a:avLst/>
+          </a:prstGeom>
+          <a:noFill/>
+        </p:spPr>
+        <p:txBody>
+          <a:bodyPr wrap="none">
+            <a:spAutoFit/>
+          </a:bodyPr>
+          <a:lstStyle/>
+          <a:p>
+            <a:r>
+              <a:rPr sz="1400" b="1">
+                <a:solidFill>
+                  <a:srgbClr val="1F2933"/>
+                </a:solidFill>
+                <a:latin typeface="NanumSquareRound"/>
+              </a:rPr>
+              <a:t>품질 편차</a:t>
+            </a:r>
+          </a:p>
+        </p:txBody>
+      </p:sp>
+      <p:sp>
+        <p:nvSpPr>
+          <p:cNvPr id="13" name="TextBox 12"/>
+          <p:cNvSpPr txBox="1"/>
+          <p:nvPr/>
+        </p:nvSpPr>
+        <p:spPr>
+          <a:xfrm>
+            <a:off x="3547872" y="1847088"/>
+            <a:ext cx="2331720" cy="731520"/>
+          </a:xfrm>
+          <a:prstGeom prst="rect">
+            <a:avLst/>
+          </a:prstGeom>
+          <a:noFill/>
+        </p:spPr>
+        <p:txBody>
+          <a:bodyPr wrap="none">
+            <a:spAutoFit/>
+          </a:bodyPr>
+          <a:lstStyle/>
+          <a:p>
+            <a:r>
+              <a:rPr sz="1100" b="0">
+                <a:solidFill>
+                  <a:srgbClr val="6B7280"/>
+                </a:solidFill>
+                <a:latin typeface="NanumSquareRound"/>
+              </a:rPr>
+              <a:t>결과물이 사람마다 다름</a:t>
+            </a:r>
+          </a:p>
+        </p:txBody>
+      </p:sp>
+      <p:sp>
+        <p:nvSpPr>
+          <p:cNvPr id="14" name="TextBox 13"/>
+          <p:cNvSpPr txBox="1"/>
+          <p:nvPr/>
+        </p:nvSpPr>
+        <p:spPr>
+          <a:xfrm>
+            <a:off x="6062472" y="1783080"/>
+            <a:ext cx="228600" cy="457200"/>
+          </a:xfrm>
+          <a:prstGeom prst="rect">
+            <a:avLst/>
+          </a:prstGeom>
+          <a:noFill/>
+        </p:spPr>
+        <p:txBody>
+          <a:bodyPr wrap="none">
+            <a:spAutoFit/>
+          </a:bodyPr>
+          <a:lstStyle/>
+          <a:p>
+            <a:r>
+              <a:rPr sz="2000" b="1">
+                <a:solidFill>
+                  <a:srgbClr val="2B6CB0"/>
+                </a:solidFill>
+                <a:latin typeface="NanumSquareRound"/>
+              </a:rPr>
+              <a:t>→</a:t>
+            </a:r>
+          </a:p>
+        </p:txBody>
+      </p:sp>
+      <p:sp>
+        <p:nvSpPr>
+          <p:cNvPr id="15" name="Rectangle 14"/>
+          <p:cNvSpPr/>
+          <p:nvPr/>
+        </p:nvSpPr>
+        <p:spPr>
+          <a:xfrm>
+            <a:off x="6272783" y="1325880"/>
+            <a:ext cx="2606040" cy="1325880"/>
+          </a:xfrm>
+          <a:prstGeom prst="rect">
+            <a:avLst/>
+          </a:prstGeom>
+          <a:solidFill>
+            <a:srgbClr val="F5F1E7"/>
+          </a:solidFill>
+          <a:ln w="19050">
+            <a:solidFill>
+              <a:srgbClr val="2B6CB0"/>
+            </a:solidFill>
+          </a:ln>
+          <a:effectLst/>
+        </p:spPr>
+        <p:style>
+          <a:lnRef idx="1">
+            <a:schemeClr val="accent1"/>
+          </a:lnRef>
+          <a:fillRef idx="3">
+            <a:schemeClr val="accent1"/>
+          </a:fillRef>
+          <a:effectRef idx="2">
+            <a:schemeClr val="accent1"/>
+          </a:effectRef>
+          <a:fontRef idx="minor">
+            <a:schemeClr val="lt1"/>
+          </a:fontRef>
+        </p:style>
+        <p:txBody>
+          <a:bodyPr rtlCol="0" anchor="ctr"/>
+          <a:lstStyle/>
+          <a:p>
+            <a:pPr algn="ctr"/>
+          </a:p>
+        </p:txBody>
+      </p:sp>
+      <p:sp>
+        <p:nvSpPr>
+          <p:cNvPr id="16" name="TextBox 15"/>
+          <p:cNvSpPr txBox="1"/>
+          <p:nvPr/>
+        </p:nvSpPr>
+        <p:spPr>
+          <a:xfrm>
+            <a:off x="6409943" y="1463040"/>
+            <a:ext cx="2331720" cy="365760"/>
+          </a:xfrm>
+          <a:prstGeom prst="rect">
+            <a:avLst/>
+          </a:prstGeom>
+          <a:noFill/>
+        </p:spPr>
+        <p:txBody>
+          <a:bodyPr wrap="none">
+            <a:spAutoFit/>
+          </a:bodyPr>
+          <a:lstStyle/>
+          <a:p>
+            <a:r>
+              <a:rPr sz="1400" b="1">
+                <a:solidFill>
+                  <a:srgbClr val="1F2933"/>
+                </a:solidFill>
+                <a:latin typeface="NanumSquareRound"/>
+              </a:rPr>
+              <a:t>근거 부재</a:t>
+            </a:r>
+          </a:p>
+        </p:txBody>
+      </p:sp>
+      <p:sp>
+        <p:nvSpPr>
+          <p:cNvPr id="17" name="TextBox 16"/>
+          <p:cNvSpPr txBox="1"/>
+          <p:nvPr/>
+        </p:nvSpPr>
+        <p:spPr>
+          <a:xfrm>
+            <a:off x="6409943" y="1847088"/>
+            <a:ext cx="2331720" cy="731520"/>
+          </a:xfrm>
+          <a:prstGeom prst="rect">
+            <a:avLst/>
+          </a:prstGeom>
+          <a:noFill/>
+        </p:spPr>
+        <p:txBody>
+          <a:bodyPr wrap="none">
+            <a:spAutoFit/>
+          </a:bodyPr>
+          <a:lstStyle/>
+          <a:p>
+            <a:r>
+              <a:rPr sz="1100" b="0">
+                <a:solidFill>
+                  <a:srgbClr val="6B7280"/>
+                </a:solidFill>
+                <a:latin typeface="NanumSquareRound"/>
+              </a:rPr>
+              <a:t>만든 근거를 확인할 수 없음</a:t>
+            </a:r>
+          </a:p>
+        </p:txBody>
+      </p:sp>
+      <p:sp>
+        <p:nvSpPr>
+          <p:cNvPr id="18" name="TextBox 17"/>
+          <p:cNvSpPr txBox="1"/>
+          <p:nvPr/>
+        </p:nvSpPr>
+        <p:spPr>
+          <a:xfrm>
+            <a:off x="8924543" y="1783080"/>
+            <a:ext cx="228600" cy="457200"/>
+          </a:xfrm>
+          <a:prstGeom prst="rect">
+            <a:avLst/>
+          </a:prstGeom>
+          <a:noFill/>
+        </p:spPr>
+        <p:txBody>
+          <a:bodyPr wrap="none">
+            <a:spAutoFit/>
+          </a:bodyPr>
+          <a:lstStyle/>
+          <a:p>
+            <a:r>
+              <a:rPr sz="2000" b="1">
+                <a:solidFill>
+                  <a:srgbClr val="2B6CB0"/>
+                </a:solidFill>
+                <a:latin typeface="NanumSquareRound"/>
+              </a:rPr>
+              <a:t>→</a:t>
+            </a:r>
+          </a:p>
+        </p:txBody>
+      </p:sp>
+      <p:sp>
+        <p:nvSpPr>
+          <p:cNvPr id="19" name="Rectangle 18"/>
+          <p:cNvSpPr/>
+          <p:nvPr/>
+        </p:nvSpPr>
+        <p:spPr>
+          <a:xfrm>
+            <a:off x="9134856" y="1325880"/>
+            <a:ext cx="2606040" cy="1325880"/>
+          </a:xfrm>
+          <a:prstGeom prst="rect">
+            <a:avLst/>
+          </a:prstGeom>
+          <a:solidFill>
+            <a:srgbClr val="F5F1E7"/>
+          </a:solidFill>
+          <a:ln w="19050">
+            <a:solidFill>
+              <a:srgbClr val="2B6CB0"/>
+            </a:solidFill>
+          </a:ln>
+          <a:effectLst/>
+        </p:spPr>
+        <p:style>
+          <a:lnRef idx="1">
+            <a:schemeClr val="accent1"/>
+          </a:lnRef>
+          <a:fillRef idx="3">
+            <a:schemeClr val="accent1"/>
+          </a:fillRef>
+          <a:effectRef idx="2">
+            <a:schemeClr val="accent1"/>
+          </a:effectRef>
+          <a:fontRef idx="minor">
+            <a:schemeClr val="lt1"/>
+          </a:fontRef>
+        </p:style>
+        <p:txBody>
+          <a:bodyPr rtlCol="0" anchor="ctr"/>
+          <a:lstStyle/>
+          <a:p>
+            <a:pPr algn="ctr"/>
+          </a:p>
+        </p:txBody>
+      </p:sp>
+      <p:sp>
+        <p:nvSpPr>
+          <p:cNvPr id="20" name="TextBox 19"/>
+          <p:cNvSpPr txBox="1"/>
+          <p:nvPr/>
+        </p:nvSpPr>
+        <p:spPr>
+          <a:xfrm>
+            <a:off x="9272016" y="1463040"/>
+            <a:ext cx="2331720" cy="365760"/>
+          </a:xfrm>
+          <a:prstGeom prst="rect">
+            <a:avLst/>
+          </a:prstGeom>
+          <a:noFill/>
+        </p:spPr>
+        <p:txBody>
+          <a:bodyPr wrap="none">
+            <a:spAutoFit/>
+          </a:bodyPr>
+          <a:lstStyle/>
+          <a:p>
+            <a:r>
+              <a:rPr sz="1400" b="1">
+                <a:solidFill>
+                  <a:srgbClr val="1F2933"/>
+                </a:solidFill>
+                <a:latin typeface="NanumSquareRound"/>
+              </a:rPr>
+              <a:t>재작업·재시작</a:t>
+            </a:r>
+          </a:p>
+        </p:txBody>
+      </p:sp>
+      <p:sp>
+        <p:nvSpPr>
+          <p:cNvPr id="21" name="TextBox 20"/>
+          <p:cNvSpPr txBox="1"/>
+          <p:nvPr/>
+        </p:nvSpPr>
+        <p:spPr>
+          <a:xfrm>
+            <a:off x="9272016" y="1847088"/>
+            <a:ext cx="2331720" cy="731520"/>
+          </a:xfrm>
+          <a:prstGeom prst="rect">
+            <a:avLst/>
+          </a:prstGeom>
+          <a:noFill/>
+        </p:spPr>
+        <p:txBody>
+          <a:bodyPr wrap="none">
+            <a:spAutoFit/>
+          </a:bodyPr>
+          <a:lstStyle/>
+          <a:p>
+            <a:r>
+              <a:rPr sz="1100" b="0">
+                <a:solidFill>
+                  <a:srgbClr val="6B7280"/>
+                </a:solidFill>
+                <a:latin typeface="NanumSquareRound"/>
+              </a:rPr>
+              <a:t>같은 업무를 반복할 때마다 다시 시작</a:t>
+            </a:r>
+          </a:p>
+        </p:txBody>
+      </p:sp>
+      <p:sp>
+        <p:nvSpPr>
+          <p:cNvPr id="22" name="TextBox 21"/>
+          <p:cNvSpPr txBox="1"/>
+          <p:nvPr/>
+        </p:nvSpPr>
+        <p:spPr>
+          <a:xfrm>
+            <a:off x="548640" y="2880360"/>
+            <a:ext cx="10972800" cy="2194560"/>
           </a:xfrm>
           <a:prstGeom prst="rect">
             <a:avLst/>
@@ -3984,7 +4542,7 @@
                 </a:solidFill>
                 <a:latin typeface="NanumSquareRound"/>
               </a:rPr>
-              <a:t>AI를 개인이 각자 사용하며, 결과물 품질이 사람마다 다릅니다.</a:t>
+              <a:t>프롬프트가 개인 기억에만 남아 팀 자산으로 축적되지 않습니다.</a:t>
             </a:r>
           </a:p>
           <a:p>
@@ -4000,7 +4558,7 @@
                 </a:solidFill>
                 <a:latin typeface="NanumSquareRound"/>
               </a:rPr>
-              <a:t>프롬프트가 개인 기억에만 남아 팀 자산으로 축적되지 않습니다.</a:t>
+              <a:t>검토·승인 기준이 명확하지 않아 결과물을 다시 고쳐야 합니다.</a:t>
             </a:r>
           </a:p>
           <a:p>
@@ -4016,7 +4574,7 @@
                 </a:solidFill>
                 <a:latin typeface="NanumSquareRound"/>
               </a:rPr>
-              <a:t>같은 업무를 반복할 때마다 다시 시작합니다(일회성 AI 사용).</a:t>
+              <a:t>실수를 발견해도 다음에 같은 실수가 반복됩니다.</a:t>
             </a:r>
           </a:p>
           <a:p>
@@ -4032,38 +4590,6 @@
                 </a:solidFill>
                 <a:latin typeface="NanumSquareRound"/>
               </a:rPr>
-              <a:t>검토·승인 기준이 명확하지 않아 결과물을 다시 고쳐야 합니다.</a:t>
-            </a:r>
-          </a:p>
-          <a:p>
-            <a:pPr>
-              <a:spcAft>
-                <a:spcPts val="800"/>
-              </a:spcAft>
-            </a:pPr>
-            <a:r>
-              <a:rPr sz="1400" b="0">
-                <a:solidFill>
-                  <a:srgbClr val="1F2933"/>
-                </a:solidFill>
-                <a:latin typeface="NanumSquareRound"/>
-              </a:rPr>
-              <a:t>실수를 발견해도 다음에 같은 실수가 반복됩니다.</a:t>
-            </a:r>
-          </a:p>
-          <a:p>
-            <a:pPr>
-              <a:spcAft>
-                <a:spcPts val="800"/>
-              </a:spcAft>
-            </a:pPr>
-            <a:r>
-              <a:rPr sz="1400" b="0">
-                <a:solidFill>
-                  <a:srgbClr val="1F2933"/>
-                </a:solidFill>
-                <a:latin typeface="NanumSquareRound"/>
-              </a:rPr>
               <a:t>AI가 무엇을 근거로 만들었는지 확인할 방법이 없습니다.</a:t>
             </a:r>
           </a:p>
@@ -4071,14 +4597,14 @@
       </p:sp>
       <p:sp>
         <p:nvSpPr>
-          <p:cNvPr id="8" name="Rectangle 7"/>
+          <p:cNvPr id="23" name="Rectangle 22"/>
           <p:cNvSpPr/>
           <p:nvPr/>
         </p:nvSpPr>
         <p:spPr>
           <a:xfrm>
-            <a:off x="548640" y="5120640"/>
-            <a:ext cx="11064240" cy="1005840"/>
+            <a:off x="548640" y="5303520"/>
+            <a:ext cx="11064240" cy="914400"/>
           </a:xfrm>
           <a:prstGeom prst="rect">
             <a:avLst/>
@@ -4325,14 +4851,94 @@
       </p:sp>
       <p:sp>
         <p:nvSpPr>
-          <p:cNvPr id="7" name="TextBox 6"/>
-          <p:cNvSpPr txBox="1"/>
-          <p:nvPr/>
-        </p:nvSpPr>
-        <p:spPr>
-          <a:xfrm>
-            <a:off x="548640" y="1280160"/>
-            <a:ext cx="10972800" cy="4114800"/>
+          <p:cNvPr id="7" name="Rectangle 6"/>
+          <p:cNvSpPr/>
+          <p:nvPr/>
+        </p:nvSpPr>
+        <p:spPr>
+          <a:xfrm>
+            <a:off x="548640" y="1325880"/>
+            <a:ext cx="5394960" cy="3566160"/>
+          </a:xfrm>
+          <a:prstGeom prst="rect">
+            <a:avLst/>
+          </a:prstGeom>
+          <a:solidFill>
+            <a:srgbClr val="F5F1E7"/>
+          </a:solidFill>
+          <a:ln w="19050">
+            <a:solidFill>
+              <a:srgbClr val="C53030"/>
+            </a:solidFill>
+          </a:ln>
+          <a:effectLst/>
+        </p:spPr>
+        <p:style>
+          <a:lnRef idx="1">
+            <a:schemeClr val="accent1"/>
+          </a:lnRef>
+          <a:fillRef idx="3">
+            <a:schemeClr val="accent1"/>
+          </a:fillRef>
+          <a:effectRef idx="2">
+            <a:schemeClr val="accent1"/>
+          </a:effectRef>
+          <a:fontRef idx="minor">
+            <a:schemeClr val="lt1"/>
+          </a:fontRef>
+        </p:style>
+        <p:txBody>
+          <a:bodyPr rtlCol="0" anchor="ctr"/>
+          <a:lstStyle/>
+          <a:p>
+            <a:pPr algn="ctr"/>
+          </a:p>
+        </p:txBody>
+      </p:sp>
+      <p:sp>
+        <p:nvSpPr>
+          <p:cNvPr id="8" name="TextBox 7"/>
+          <p:cNvSpPr txBox="1"/>
+          <p:nvPr/>
+        </p:nvSpPr>
+        <p:spPr>
+          <a:xfrm>
+            <a:off x="777240" y="1463040"/>
+            <a:ext cx="4937760" cy="365760"/>
+          </a:xfrm>
+          <a:prstGeom prst="rect">
+            <a:avLst/>
+          </a:prstGeom>
+          <a:noFill/>
+        </p:spPr>
+        <p:txBody>
+          <a:bodyPr wrap="none">
+            <a:spAutoFit/>
+          </a:bodyPr>
+          <a:lstStyle/>
+          <a:p>
+            <a:r>
+              <a:rPr sz="1500" b="1">
+                <a:solidFill>
+                  <a:srgbClr val="C53030"/>
+                </a:solidFill>
+                <a:latin typeface="NanumSquareRound"/>
+              </a:rPr>
+              <a:t>일반 AI 교육</a:t>
+            </a:r>
+          </a:p>
+        </p:txBody>
+      </p:sp>
+      <p:sp>
+        <p:nvSpPr>
+          <p:cNvPr id="9" name="TextBox 8"/>
+          <p:cNvSpPr txBox="1"/>
+          <p:nvPr/>
+        </p:nvSpPr>
+        <p:spPr>
+          <a:xfrm>
+            <a:off x="777240" y="1920240"/>
+            <a:ext cx="4937760" cy="2743200"/>
           </a:xfrm>
           <a:prstGeom prst="rect">
             <a:avLst/>
@@ -4351,13 +4957,13 @@
               </a:spcAft>
             </a:pPr>
             <a:r>
-              <a:rPr sz="1400" b="0">
+              <a:rPr sz="1200" b="0">
                 <a:solidFill>
                   <a:srgbClr val="1F2933"/>
                 </a:solidFill>
                 <a:latin typeface="NanumSquareRound"/>
               </a:rPr>
-              <a:t>일반 AI 교육은 '할 수 있는 일'을 보여주지만, 조직의 특정 업무를 고정하지 않습니다.</a:t>
+              <a:t>'할 수 있는 일'을 보여주지만 특정 업무를 고정하지 않습니다.</a:t>
             </a:r>
           </a:p>
           <a:p>
@@ -4367,13 +4973,13 @@
               </a:spcAft>
             </a:pPr>
             <a:r>
-              <a:rPr sz="1400" b="0">
+              <a:rPr sz="1200" b="0">
                 <a:solidFill>
                   <a:srgbClr val="1F2933"/>
                 </a:solidFill>
                 <a:latin typeface="NanumSquareRound"/>
               </a:rPr>
-              <a:t>교육 후 개인별 사용으로 돌아가며 조직 절차로 남지 않습니다.</a:t>
+              <a:t>교육 후 개인별 사용으로 돌아가 조직 절차로 남지 않습니다.</a:t>
             </a:r>
           </a:p>
           <a:p>
@@ -4383,13 +4989,13 @@
               </a:spcAft>
             </a:pPr>
             <a:r>
-              <a:rPr sz="1400" b="0">
+              <a:rPr sz="1200" b="0">
                 <a:solidFill>
                   <a:srgbClr val="1F2933"/>
                 </a:solidFill>
                 <a:latin typeface="NanumSquareRound"/>
               </a:rPr>
-              <a:t>업무별 입력자료·증거·예외·승인 기준은 조직마다 달라 교육으로 규격화되지 않습니다.</a:t>
+              <a:t>업무별 입력자료·증거·예외·승인 기준은 조직마다 달라 규격화되지 않습니다.</a:t>
             </a:r>
           </a:p>
           <a:p>
@@ -4399,15 +5005,118 @@
               </a:spcAft>
             </a:pPr>
             <a:r>
-              <a:rPr sz="1400" b="0">
+              <a:rPr sz="1200" b="0">
                 <a:solidFill>
                   <a:srgbClr val="1F2933"/>
                 </a:solidFill>
                 <a:latin typeface="NanumSquareRound"/>
               </a:rPr>
-              <a:t>교육은 사람 검토·승인 흐름을 업무 절차로 묶지 않습니다.</a:t>
-            </a:r>
-          </a:p>
+              <a:t>사람 검토·승인 흐름을 업무 절차로 묶지 않습니다.</a:t>
+            </a:r>
+          </a:p>
+        </p:txBody>
+      </p:sp>
+      <p:sp>
+        <p:nvSpPr>
+          <p:cNvPr id="10" name="Rectangle 9"/>
+          <p:cNvSpPr/>
+          <p:nvPr/>
+        </p:nvSpPr>
+        <p:spPr>
+          <a:xfrm>
+            <a:off x="6263640" y="1325880"/>
+            <a:ext cx="5394960" cy="3566160"/>
+          </a:xfrm>
+          <a:prstGeom prst="rect">
+            <a:avLst/>
+          </a:prstGeom>
+          <a:solidFill>
+            <a:srgbClr val="F5F1E7"/>
+          </a:solidFill>
+          <a:ln w="19050">
+            <a:solidFill>
+              <a:srgbClr val="2F855A"/>
+            </a:solidFill>
+          </a:ln>
+          <a:effectLst/>
+        </p:spPr>
+        <p:style>
+          <a:lnRef idx="1">
+            <a:schemeClr val="accent1"/>
+          </a:lnRef>
+          <a:fillRef idx="3">
+            <a:schemeClr val="accent1"/>
+          </a:fillRef>
+          <a:effectRef idx="2">
+            <a:schemeClr val="accent1"/>
+          </a:effectRef>
+          <a:fontRef idx="minor">
+            <a:schemeClr val="lt1"/>
+          </a:fontRef>
+        </p:style>
+        <p:txBody>
+          <a:bodyPr rtlCol="0" anchor="ctr"/>
+          <a:lstStyle/>
+          <a:p>
+            <a:pPr algn="ctr"/>
+          </a:p>
+        </p:txBody>
+      </p:sp>
+      <p:sp>
+        <p:nvSpPr>
+          <p:cNvPr id="11" name="TextBox 10"/>
+          <p:cNvSpPr txBox="1"/>
+          <p:nvPr/>
+        </p:nvSpPr>
+        <p:spPr>
+          <a:xfrm>
+            <a:off x="6492240" y="1463040"/>
+            <a:ext cx="4937760" cy="365760"/>
+          </a:xfrm>
+          <a:prstGeom prst="rect">
+            <a:avLst/>
+          </a:prstGeom>
+          <a:noFill/>
+        </p:spPr>
+        <p:txBody>
+          <a:bodyPr wrap="none">
+            <a:spAutoFit/>
+          </a:bodyPr>
+          <a:lstStyle/>
+          <a:p>
+            <a:r>
+              <a:rPr sz="1500" b="1">
+                <a:solidFill>
+                  <a:srgbClr val="2F855A"/>
+                </a:solidFill>
+                <a:latin typeface="NanumSquareRound"/>
+              </a:rPr>
+              <a:t>Business 32 전환 프로그램</a:t>
+            </a:r>
+          </a:p>
+        </p:txBody>
+      </p:sp>
+      <p:sp>
+        <p:nvSpPr>
+          <p:cNvPr id="12" name="TextBox 11"/>
+          <p:cNvSpPr txBox="1"/>
+          <p:nvPr/>
+        </p:nvSpPr>
+        <p:spPr>
+          <a:xfrm>
+            <a:off x="6492240" y="1920240"/>
+            <a:ext cx="4937760" cy="2743200"/>
+          </a:xfrm>
+          <a:prstGeom prst="rect">
+            <a:avLst/>
+          </a:prstGeom>
+          <a:noFill/>
+        </p:spPr>
+        <p:txBody>
+          <a:bodyPr wrap="square">
+            <a:spAutoFit/>
+          </a:bodyPr>
+          <a:lstStyle/>
           <a:p>
             <a:pPr>
               <a:spcAft>
@@ -4415,13 +5124,114 @@
               </a:spcAft>
             </a:pPr>
             <a:r>
-              <a:rPr sz="1400" b="0">
+              <a:rPr sz="1200" b="0">
                 <a:solidFill>
                   <a:srgbClr val="1F2933"/>
                 </a:solidFill>
                 <a:latin typeface="NanumSquareRound"/>
               </a:rPr>
-              <a:t>이 프로그램은 '업무 1개'를 입력·단계·증거·검토·예외·승인 기준을 포함한 스킬로 전환합니다.</a:t>
+              <a:t>반복업무 1개를 고객과 함께 선정하고 고정합니다.</a:t>
+            </a:r>
+          </a:p>
+          <a:p>
+            <a:pPr>
+              <a:spcAft>
+                <a:spcPts val="800"/>
+              </a:spcAft>
+            </a:pPr>
+            <a:r>
+              <a:rPr sz="1200" b="0">
+                <a:solidFill>
+                  <a:srgbClr val="1F2933"/>
+                </a:solidFill>
+                <a:latin typeface="NanumSquareRound"/>
+              </a:rPr>
+              <a:t>입력자료·단계·증거·검토·예외·승인 기준을 스킬에 포함합니다.</a:t>
+            </a:r>
+          </a:p>
+          <a:p>
+            <a:pPr>
+              <a:spcAft>
+                <a:spcPts val="800"/>
+              </a:spcAft>
+            </a:pPr>
+            <a:r>
+              <a:rPr sz="1200" b="0">
+                <a:solidFill>
+                  <a:srgbClr val="1F2933"/>
+                </a:solidFill>
+                <a:latin typeface="NanumSquareRound"/>
+              </a:rPr>
+              <a:t>검토·승인 흐름을 업무 절차로 통합합니다.</a:t>
+            </a:r>
+          </a:p>
+          <a:p>
+            <a:pPr>
+              <a:spcAft>
+                <a:spcPts val="800"/>
+              </a:spcAft>
+            </a:pPr>
+            <a:r>
+              <a:rPr sz="1200" b="0">
+                <a:solidFill>
+                  <a:srgbClr val="1F2933"/>
+                </a:solidFill>
+                <a:latin typeface="NanumSquareRound"/>
+              </a:rPr>
+              <a:t>증거와 함께 재사용 가능한 스킬 카드로 납품합니다.</a:t>
+            </a:r>
+          </a:p>
+        </p:txBody>
+      </p:sp>
+      <p:sp>
+        <p:nvSpPr>
+          <p:cNvPr id="13" name="Rectangle 12"/>
+          <p:cNvSpPr/>
+          <p:nvPr/>
+        </p:nvSpPr>
+        <p:spPr>
+          <a:xfrm>
+            <a:off x="548640" y="5120640"/>
+            <a:ext cx="11109960" cy="914400"/>
+          </a:xfrm>
+          <a:prstGeom prst="rect">
+            <a:avLst/>
+          </a:prstGeom>
+          <a:solidFill>
+            <a:srgbClr val="2B6CB0"/>
+          </a:solidFill>
+          <a:ln>
+            <a:noFill/>
+          </a:ln>
+          <a:effectLst/>
+        </p:spPr>
+        <p:style>
+          <a:lnRef idx="1">
+            <a:schemeClr val="accent1"/>
+          </a:lnRef>
+          <a:fillRef idx="3">
+            <a:schemeClr val="accent1"/>
+          </a:fillRef>
+          <a:effectRef idx="2">
+            <a:schemeClr val="accent1"/>
+          </a:effectRef>
+          <a:fontRef idx="minor">
+            <a:schemeClr val="lt1"/>
+          </a:fontRef>
+        </p:style>
+        <p:txBody>
+          <a:bodyPr rtlCol="0" anchor="ctr" wrap="square" lIns="109728" rIns="109728" tIns="54864" bIns="54864"/>
+          <a:lstStyle/>
+          <a:p>
+            <a:pPr algn="ctr"/>
+            <a:r>
+              <a:rPr sz="1300" b="1">
+                <a:solidFill>
+                  <a:srgbClr val="FFFFFF"/>
+                </a:solidFill>
+                <a:latin typeface="NanumSquareRound"/>
+              </a:rPr>
+              <a:t>핵심 차이: '할 수 있는 일'이 아니라, 조직 업무 1개를 증거와 검토·승인 기준이 붙은 재사용 가능한 스킬로 전환합니다.</a:t>
             </a:r>
           </a:p>
         </p:txBody>
@@ -5721,7 +6531,7 @@
         <p:spPr>
           <a:xfrm>
             <a:off x="640080" y="1280160"/>
-            <a:ext cx="3566160" cy="1280160"/>
+            <a:ext cx="3566160" cy="1097280"/>
           </a:xfrm>
           <a:prstGeom prst="rect">
             <a:avLst/>
@@ -5766,7 +6576,7 @@
         </p:nvSpPr>
         <p:spPr>
           <a:xfrm>
-            <a:off x="822960" y="1417320"/>
+            <a:off x="822960" y="1389888"/>
             <a:ext cx="3200400" cy="365760"/>
           </a:xfrm>
           <a:prstGeom prst="rect">
@@ -5781,7 +6591,7 @@
           <a:lstStyle/>
           <a:p>
             <a:r>
-              <a:rPr sz="1400" b="1">
+              <a:rPr sz="1300" b="1">
                 <a:solidFill>
                   <a:srgbClr val="2F855A"/>
                 </a:solidFill>
@@ -5800,8 +6610,8 @@
         </p:nvSpPr>
         <p:spPr>
           <a:xfrm>
-            <a:off x="822960" y="1783080"/>
-            <a:ext cx="3200400" cy="640080"/>
+            <a:off x="822960" y="1755648"/>
+            <a:ext cx="3200400" cy="502920"/>
           </a:xfrm>
           <a:prstGeom prst="rect">
             <a:avLst/>
@@ -5835,7 +6645,7 @@
         <p:spPr>
           <a:xfrm>
             <a:off x="4434840" y="1280160"/>
-            <a:ext cx="3566160" cy="1280160"/>
+            <a:ext cx="3566160" cy="1097280"/>
           </a:xfrm>
           <a:prstGeom prst="rect">
             <a:avLst/>
@@ -5880,7 +6690,7 @@
         </p:nvSpPr>
         <p:spPr>
           <a:xfrm>
-            <a:off x="4617720" y="1417320"/>
+            <a:off x="4617720" y="1389888"/>
             <a:ext cx="3200400" cy="365760"/>
           </a:xfrm>
           <a:prstGeom prst="rect">
@@ -5895,7 +6705,7 @@
           <a:lstStyle/>
           <a:p>
             <a:r>
-              <a:rPr sz="1400" b="1">
+              <a:rPr sz="1300" b="1">
                 <a:solidFill>
                   <a:srgbClr val="2F855A"/>
                 </a:solidFill>
@@ -5914,8 +6724,8 @@
         </p:nvSpPr>
         <p:spPr>
           <a:xfrm>
-            <a:off x="4617720" y="1783080"/>
-            <a:ext cx="3200400" cy="640080"/>
+            <a:off x="4617720" y="1755648"/>
+            <a:ext cx="3200400" cy="502920"/>
           </a:xfrm>
           <a:prstGeom prst="rect">
             <a:avLst/>
@@ -5949,7 +6759,7 @@
         <p:spPr>
           <a:xfrm>
             <a:off x="8229600" y="1280160"/>
-            <a:ext cx="3566160" cy="1280160"/>
+            <a:ext cx="3566160" cy="1097280"/>
           </a:xfrm>
           <a:prstGeom prst="rect">
             <a:avLst/>
@@ -5994,7 +6804,7 @@
         </p:nvSpPr>
         <p:spPr>
           <a:xfrm>
-            <a:off x="8412480" y="1417320"/>
+            <a:off x="8412480" y="1389888"/>
             <a:ext cx="3200400" cy="365760"/>
           </a:xfrm>
           <a:prstGeom prst="rect">
@@ -6009,7 +6819,7 @@
           <a:lstStyle/>
           <a:p>
             <a:r>
-              <a:rPr sz="1400" b="1">
+              <a:rPr sz="1300" b="1">
                 <a:solidFill>
                   <a:srgbClr val="2F855A"/>
                 </a:solidFill>
@@ -6028,8 +6838,8 @@
         </p:nvSpPr>
         <p:spPr>
           <a:xfrm>
-            <a:off x="8412480" y="1783080"/>
-            <a:ext cx="3200400" cy="640080"/>
+            <a:off x="8412480" y="1755648"/>
+            <a:ext cx="3200400" cy="502920"/>
           </a:xfrm>
           <a:prstGeom prst="rect">
             <a:avLst/>
@@ -6062,8 +6872,8 @@
         </p:nvSpPr>
         <p:spPr>
           <a:xfrm>
-            <a:off x="640080" y="2834639"/>
-            <a:ext cx="3566160" cy="1280160"/>
+            <a:off x="640080" y="2514600"/>
+            <a:ext cx="3566160" cy="1097280"/>
           </a:xfrm>
           <a:prstGeom prst="rect">
             <a:avLst/>
@@ -6108,7 +6918,7 @@
         </p:nvSpPr>
         <p:spPr>
           <a:xfrm>
-            <a:off x="822960" y="2971799"/>
+            <a:off x="822960" y="2624328"/>
             <a:ext cx="3200400" cy="365760"/>
           </a:xfrm>
           <a:prstGeom prst="rect">
@@ -6123,7 +6933,7 @@
           <a:lstStyle/>
           <a:p>
             <a:r>
-              <a:rPr sz="1400" b="1">
+              <a:rPr sz="1300" b="1">
                 <a:solidFill>
                   <a:srgbClr val="2F855A"/>
                 </a:solidFill>
@@ -6142,8 +6952,8 @@
         </p:nvSpPr>
         <p:spPr>
           <a:xfrm>
-            <a:off x="822960" y="3337559"/>
-            <a:ext cx="3200400" cy="640080"/>
+            <a:off x="822960" y="2990088"/>
+            <a:ext cx="3200400" cy="502920"/>
           </a:xfrm>
           <a:prstGeom prst="rect">
             <a:avLst/>
@@ -6176,8 +6986,8 @@
         </p:nvSpPr>
         <p:spPr>
           <a:xfrm>
-            <a:off x="4434840" y="2834639"/>
-            <a:ext cx="3566160" cy="1280160"/>
+            <a:off x="4434840" y="2514600"/>
+            <a:ext cx="3566160" cy="1097280"/>
           </a:xfrm>
           <a:prstGeom prst="rect">
             <a:avLst/>
@@ -6222,7 +7032,7 @@
         </p:nvSpPr>
         <p:spPr>
           <a:xfrm>
-            <a:off x="4617720" y="2971799"/>
+            <a:off x="4617720" y="2624328"/>
             <a:ext cx="3200400" cy="365760"/>
           </a:xfrm>
           <a:prstGeom prst="rect">
@@ -6237,7 +7047,7 @@
           <a:lstStyle/>
           <a:p>
             <a:r>
-              <a:rPr sz="1400" b="1">
+              <a:rPr sz="1300" b="1">
                 <a:solidFill>
                   <a:srgbClr val="2F855A"/>
                 </a:solidFill>
@@ -6256,8 +7066,8 @@
         </p:nvSpPr>
         <p:spPr>
           <a:xfrm>
-            <a:off x="4617720" y="3337559"/>
-            <a:ext cx="3200400" cy="640080"/>
+            <a:off x="4617720" y="2990088"/>
+            <a:ext cx="3200400" cy="502920"/>
           </a:xfrm>
           <a:prstGeom prst="rect">
             <a:avLst/>
@@ -6290,8 +7100,8 @@
         </p:nvSpPr>
         <p:spPr>
           <a:xfrm>
-            <a:off x="8229600" y="2834639"/>
-            <a:ext cx="3566160" cy="1280160"/>
+            <a:off x="8229600" y="2514600"/>
+            <a:ext cx="3566160" cy="1097280"/>
           </a:xfrm>
           <a:prstGeom prst="rect">
             <a:avLst/>
@@ -6336,7 +7146,7 @@
         </p:nvSpPr>
         <p:spPr>
           <a:xfrm>
-            <a:off x="8412480" y="2971799"/>
+            <a:off x="8412480" y="2624328"/>
             <a:ext cx="3200400" cy="365760"/>
           </a:xfrm>
           <a:prstGeom prst="rect">
@@ -6351,7 +7161,7 @@
           <a:lstStyle/>
           <a:p>
             <a:r>
-              <a:rPr sz="1400" b="1">
+              <a:rPr sz="1300" b="1">
                 <a:solidFill>
                   <a:srgbClr val="2F855A"/>
                 </a:solidFill>
@@ -6370,8 +7180,8 @@
         </p:nvSpPr>
         <p:spPr>
           <a:xfrm>
-            <a:off x="8412480" y="3337559"/>
-            <a:ext cx="3200400" cy="640080"/>
+            <a:off x="8412480" y="2990088"/>
+            <a:ext cx="3200400" cy="502920"/>
           </a:xfrm>
           <a:prstGeom prst="rect">
             <a:avLst/>
@@ -6404,8 +7214,8 @@
         </p:nvSpPr>
         <p:spPr>
           <a:xfrm>
-            <a:off x="640080" y="4389120"/>
-            <a:ext cx="3566160" cy="1280160"/>
+            <a:off x="640080" y="3749039"/>
+            <a:ext cx="3566160" cy="1097280"/>
           </a:xfrm>
           <a:prstGeom prst="rect">
             <a:avLst/>
@@ -6450,7 +7260,7 @@
         </p:nvSpPr>
         <p:spPr>
           <a:xfrm>
-            <a:off x="822960" y="4526280"/>
+            <a:off x="822960" y="3858767"/>
             <a:ext cx="3200400" cy="365760"/>
           </a:xfrm>
           <a:prstGeom prst="rect">
@@ -6465,7 +7275,7 @@
           <a:lstStyle/>
           <a:p>
             <a:r>
-              <a:rPr sz="1400" b="1">
+              <a:rPr sz="1300" b="1">
                 <a:solidFill>
                   <a:srgbClr val="2F855A"/>
                 </a:solidFill>
@@ -6484,8 +7294,8 @@
         </p:nvSpPr>
         <p:spPr>
           <a:xfrm>
-            <a:off x="822960" y="4892040"/>
-            <a:ext cx="3200400" cy="640080"/>
+            <a:off x="822960" y="4224527"/>
+            <a:ext cx="3200400" cy="502920"/>
           </a:xfrm>
           <a:prstGeom prst="rect">
             <a:avLst/>
@@ -6518,8 +7328,8 @@
         </p:nvSpPr>
         <p:spPr>
           <a:xfrm>
-            <a:off x="4434840" y="4389120"/>
-            <a:ext cx="3566160" cy="1280160"/>
+            <a:off x="4434840" y="3749039"/>
+            <a:ext cx="3566160" cy="1097280"/>
           </a:xfrm>
           <a:prstGeom prst="rect">
             <a:avLst/>
@@ -6564,7 +7374,7 @@
         </p:nvSpPr>
         <p:spPr>
           <a:xfrm>
-            <a:off x="4617720" y="4526280"/>
+            <a:off x="4617720" y="3858767"/>
             <a:ext cx="3200400" cy="365760"/>
           </a:xfrm>
           <a:prstGeom prst="rect">
@@ -6579,7 +7389,7 @@
           <a:lstStyle/>
           <a:p>
             <a:r>
-              <a:rPr sz="1400" b="1">
+              <a:rPr sz="1300" b="1">
                 <a:solidFill>
                   <a:srgbClr val="2F855A"/>
                 </a:solidFill>
@@ -6598,8 +7408,8 @@
         </p:nvSpPr>
         <p:spPr>
           <a:xfrm>
-            <a:off x="4617720" y="4892040"/>
-            <a:ext cx="3200400" cy="640080"/>
+            <a:off x="4617720" y="4224527"/>
+            <a:ext cx="3200400" cy="502920"/>
           </a:xfrm>
           <a:prstGeom prst="rect">
             <a:avLst/>
@@ -6632,8 +7442,8 @@
         </p:nvSpPr>
         <p:spPr>
           <a:xfrm>
-            <a:off x="8229600" y="4389120"/>
-            <a:ext cx="3566160" cy="1280160"/>
+            <a:off x="8229600" y="3749039"/>
+            <a:ext cx="3566160" cy="1097280"/>
           </a:xfrm>
           <a:prstGeom prst="rect">
             <a:avLst/>
@@ -6678,7 +7488,7 @@
         </p:nvSpPr>
         <p:spPr>
           <a:xfrm>
-            <a:off x="8412480" y="4526280"/>
+            <a:off x="8412480" y="3858767"/>
             <a:ext cx="3200400" cy="365760"/>
           </a:xfrm>
           <a:prstGeom prst="rect">
@@ -6693,7 +7503,7 @@
           <a:lstStyle/>
           <a:p>
             <a:r>
-              <a:rPr sz="1400" b="1">
+              <a:rPr sz="1300" b="1">
                 <a:solidFill>
                   <a:srgbClr val="2F855A"/>
                 </a:solidFill>
@@ -6712,8 +7522,8 @@
         </p:nvSpPr>
         <p:spPr>
           <a:xfrm>
-            <a:off x="8412480" y="4892040"/>
-            <a:ext cx="3200400" cy="640080"/>
+            <a:off x="8412480" y="4224527"/>
+            <a:ext cx="3200400" cy="502920"/>
           </a:xfrm>
           <a:prstGeom prst="rect">
             <a:avLst/>
@@ -6746,8 +7556,8 @@
         </p:nvSpPr>
         <p:spPr>
           <a:xfrm>
-            <a:off x="640080" y="5943600"/>
-            <a:ext cx="3566160" cy="1280160"/>
+            <a:off x="640080" y="4983480"/>
+            <a:ext cx="3566160" cy="1097280"/>
           </a:xfrm>
           <a:prstGeom prst="rect">
             <a:avLst/>
@@ -6792,7 +7602,7 @@
         </p:nvSpPr>
         <p:spPr>
           <a:xfrm>
-            <a:off x="822960" y="6080760"/>
+            <a:off x="822960" y="5093208"/>
             <a:ext cx="3200400" cy="365760"/>
           </a:xfrm>
           <a:prstGeom prst="rect">
@@ -6807,7 +7617,7 @@
           <a:lstStyle/>
           <a:p>
             <a:r>
-              <a:rPr sz="1400" b="1">
+              <a:rPr sz="1300" b="1">
                 <a:solidFill>
                   <a:srgbClr val="2F855A"/>
                 </a:solidFill>
@@ -6826,8 +7636,8 @@
         </p:nvSpPr>
         <p:spPr>
           <a:xfrm>
-            <a:off x="822960" y="6446520"/>
-            <a:ext cx="3200400" cy="640080"/>
+            <a:off x="822960" y="5458968"/>
+            <a:ext cx="3200400" cy="502920"/>
           </a:xfrm>
           <a:prstGeom prst="rect">
             <a:avLst/>
@@ -6860,8 +7670,8 @@
         </p:nvSpPr>
         <p:spPr>
           <a:xfrm>
-            <a:off x="4434840" y="5943600"/>
-            <a:ext cx="3566160" cy="1280160"/>
+            <a:off x="4434840" y="4983480"/>
+            <a:ext cx="3566160" cy="1097280"/>
           </a:xfrm>
           <a:prstGeom prst="rect">
             <a:avLst/>
@@ -6906,7 +7716,7 @@
         </p:nvSpPr>
         <p:spPr>
           <a:xfrm>
-            <a:off x="4617720" y="6080760"/>
+            <a:off x="4617720" y="5093208"/>
             <a:ext cx="3200400" cy="365760"/>
           </a:xfrm>
           <a:prstGeom prst="rect">
@@ -6921,7 +7731,7 @@
           <a:lstStyle/>
           <a:p>
             <a:r>
-              <a:rPr sz="1400" b="1">
+              <a:rPr sz="1300" b="1">
                 <a:solidFill>
                   <a:srgbClr val="2F855A"/>
                 </a:solidFill>
@@ -6940,8 +7750,8 @@
         </p:nvSpPr>
         <p:spPr>
           <a:xfrm>
-            <a:off x="4617720" y="6446520"/>
-            <a:ext cx="3200400" cy="640080"/>
+            <a:off x="4617720" y="5458968"/>
+            <a:ext cx="3200400" cy="502920"/>
           </a:xfrm>
           <a:prstGeom prst="rect">
             <a:avLst/>
@@ -6974,8 +7784,8 @@
         </p:nvSpPr>
         <p:spPr>
           <a:xfrm>
-            <a:off x="8229600" y="5943600"/>
-            <a:ext cx="3566160" cy="1280160"/>
+            <a:off x="8229600" y="4983480"/>
+            <a:ext cx="3566160" cy="1097280"/>
           </a:xfrm>
           <a:prstGeom prst="rect">
             <a:avLst/>
@@ -7020,7 +7830,7 @@
         </p:nvSpPr>
         <p:spPr>
           <a:xfrm>
-            <a:off x="8412480" y="6080760"/>
+            <a:off x="8412480" y="5093208"/>
             <a:ext cx="3200400" cy="365760"/>
           </a:xfrm>
           <a:prstGeom prst="rect">
@@ -7035,7 +7845,7 @@
           <a:lstStyle/>
           <a:p>
             <a:r>
-              <a:rPr sz="1400" b="1">
+              <a:rPr sz="1300" b="1">
                 <a:solidFill>
                   <a:srgbClr val="2F855A"/>
                 </a:solidFill>
@@ -7054,8 +7864,8 @@
         </p:nvSpPr>
         <p:spPr>
           <a:xfrm>
-            <a:off x="8412480" y="6446520"/>
-            <a:ext cx="3200400" cy="640080"/>
+            <a:off x="8412480" y="5458968"/>
+            <a:ext cx="3200400" cy="502920"/>
           </a:xfrm>
           <a:prstGeom prst="rect">
             <a:avLst/>
@@ -7287,8 +8097,8 @@
         </p:nvSpPr>
         <p:spPr>
           <a:xfrm>
-            <a:off x="640080" y="1234440"/>
-            <a:ext cx="3291840" cy="685800"/>
+            <a:off x="640080" y="1280160"/>
+            <a:ext cx="3291840" cy="640080"/>
           </a:xfrm>
           <a:prstGeom prst="rect">
             <a:avLst/>
@@ -7340,8 +8150,8 @@
         </p:nvSpPr>
         <p:spPr>
           <a:xfrm>
-            <a:off x="4069080" y="1234440"/>
-            <a:ext cx="3291840" cy="685800"/>
+            <a:off x="4069080" y="1280160"/>
+            <a:ext cx="3291840" cy="640080"/>
           </a:xfrm>
           <a:prstGeom prst="rect">
             <a:avLst/>
@@ -7393,8 +8203,8 @@
         </p:nvSpPr>
         <p:spPr>
           <a:xfrm>
-            <a:off x="7498079" y="1234440"/>
-            <a:ext cx="4023360" cy="685800"/>
+            <a:off x="7498079" y="1280160"/>
+            <a:ext cx="4023360" cy="640080"/>
           </a:xfrm>
           <a:prstGeom prst="rect">
             <a:avLst/>
@@ -7440,28 +8250,74 @@
       </p:sp>
       <p:sp>
         <p:nvSpPr>
-          <p:cNvPr id="10" name="TextBox 9"/>
-          <p:cNvSpPr txBox="1"/>
-          <p:nvPr/>
-        </p:nvSpPr>
-        <p:spPr>
-          <a:xfrm>
-            <a:off x="640080" y="2194560"/>
-            <a:ext cx="5120640" cy="3840480"/>
-          </a:xfrm>
-          <a:prstGeom prst="rect">
-            <a:avLst/>
-          </a:prstGeom>
-          <a:noFill/>
-        </p:spPr>
-        <p:txBody>
-          <a:bodyPr wrap="square">
-            <a:spAutoFit/>
-          </a:bodyPr>
-          <a:lstStyle/>
-          <a:p>
-            <a:r>
-              <a:rPr sz="1600" b="1">
+          <p:cNvPr id="10" name="Rectangle 9"/>
+          <p:cNvSpPr/>
+          <p:nvPr/>
+        </p:nvSpPr>
+        <p:spPr>
+          <a:xfrm>
+            <a:off x="640080" y="2148840"/>
+            <a:ext cx="5394960" cy="3291840"/>
+          </a:xfrm>
+          <a:prstGeom prst="rect">
+            <a:avLst/>
+          </a:prstGeom>
+          <a:solidFill>
+            <a:srgbClr val="F5F1E7"/>
+          </a:solidFill>
+          <a:ln w="19050">
+            <a:solidFill>
+              <a:srgbClr val="2B6CB0"/>
+            </a:solidFill>
+          </a:ln>
+          <a:effectLst/>
+        </p:spPr>
+        <p:style>
+          <a:lnRef idx="1">
+            <a:schemeClr val="accent1"/>
+          </a:lnRef>
+          <a:fillRef idx="3">
+            <a:schemeClr val="accent1"/>
+          </a:fillRef>
+          <a:effectRef idx="2">
+            <a:schemeClr val="accent1"/>
+          </a:effectRef>
+          <a:fontRef idx="minor">
+            <a:schemeClr val="lt1"/>
+          </a:fontRef>
+        </p:style>
+        <p:txBody>
+          <a:bodyPr rtlCol="0" anchor="ctr"/>
+          <a:lstStyle/>
+          <a:p>
+            <a:pPr algn="ctr"/>
+          </a:p>
+        </p:txBody>
+      </p:sp>
+      <p:sp>
+        <p:nvSpPr>
+          <p:cNvPr id="11" name="TextBox 10"/>
+          <p:cNvSpPr txBox="1"/>
+          <p:nvPr/>
+        </p:nvSpPr>
+        <p:spPr>
+          <a:xfrm>
+            <a:off x="868680" y="2286000"/>
+            <a:ext cx="4937760" cy="365760"/>
+          </a:xfrm>
+          <a:prstGeom prst="rect">
+            <a:avLst/>
+          </a:prstGeom>
+          <a:noFill/>
+        </p:spPr>
+        <p:txBody>
+          <a:bodyPr wrap="none">
+            <a:spAutoFit/>
+          </a:bodyPr>
+          <a:lstStyle/>
+          <a:p>
+            <a:r>
+              <a:rPr sz="1500" b="1">
                 <a:solidFill>
                   <a:srgbClr val="1F2933"/>
                 </a:solidFill>
@@ -7470,14 +8326,32 @@
               <a:t>산출물</a:t>
             </a:r>
           </a:p>
-          <a:p>
-            <a:pPr>
-              <a:spcAft>
-                <a:spcPts val="600"/>
-              </a:spcAft>
-            </a:pPr>
-            <a:r>
-              <a:rPr sz="1300" b="0">
+        </p:txBody>
+      </p:sp>
+      <p:sp>
+        <p:nvSpPr>
+          <p:cNvPr id="12" name="TextBox 11"/>
+          <p:cNvSpPr txBox="1"/>
+          <p:nvPr/>
+        </p:nvSpPr>
+        <p:spPr>
+          <a:xfrm>
+            <a:off x="868680" y="2743200"/>
+            <a:ext cx="4937760" cy="365760"/>
+          </a:xfrm>
+          <a:prstGeom prst="rect">
+            <a:avLst/>
+          </a:prstGeom>
+          <a:noFill/>
+        </p:spPr>
+        <p:txBody>
+          <a:bodyPr wrap="none">
+            <a:spAutoFit/>
+          </a:bodyPr>
+          <a:lstStyle/>
+          <a:p>
+            <a:r>
+              <a:rPr sz="1200" b="0">
                 <a:solidFill>
                   <a:srgbClr val="1F2933"/>
                 </a:solidFill>
@@ -7486,14 +8360,32 @@
               <a:t>• 업무 범위</a:t>
             </a:r>
           </a:p>
-          <a:p>
-            <a:pPr>
-              <a:spcAft>
-                <a:spcPts val="600"/>
-              </a:spcAft>
-            </a:pPr>
-            <a:r>
-              <a:rPr sz="1300" b="0">
+        </p:txBody>
+      </p:sp>
+      <p:sp>
+        <p:nvSpPr>
+          <p:cNvPr id="13" name="TextBox 12"/>
+          <p:cNvSpPr txBox="1"/>
+          <p:nvPr/>
+        </p:nvSpPr>
+        <p:spPr>
+          <a:xfrm>
+            <a:off x="868680" y="3163824"/>
+            <a:ext cx="4937760" cy="365760"/>
+          </a:xfrm>
+          <a:prstGeom prst="rect">
+            <a:avLst/>
+          </a:prstGeom>
+          <a:noFill/>
+        </p:spPr>
+        <p:txBody>
+          <a:bodyPr wrap="none">
+            <a:spAutoFit/>
+          </a:bodyPr>
+          <a:lstStyle/>
+          <a:p>
+            <a:r>
+              <a:rPr sz="1200" b="0">
                 <a:solidFill>
                   <a:srgbClr val="1F2933"/>
                 </a:solidFill>
@@ -7502,14 +8394,32 @@
               <a:t>• 필요 입력자료</a:t>
             </a:r>
           </a:p>
-          <a:p>
-            <a:pPr>
-              <a:spcAft>
-                <a:spcPts val="600"/>
-              </a:spcAft>
-            </a:pPr>
-            <a:r>
-              <a:rPr sz="1300" b="0">
+        </p:txBody>
+      </p:sp>
+      <p:sp>
+        <p:nvSpPr>
+          <p:cNvPr id="14" name="TextBox 13"/>
+          <p:cNvSpPr txBox="1"/>
+          <p:nvPr/>
+        </p:nvSpPr>
+        <p:spPr>
+          <a:xfrm>
+            <a:off x="868680" y="3584448"/>
+            <a:ext cx="4937760" cy="365760"/>
+          </a:xfrm>
+          <a:prstGeom prst="rect">
+            <a:avLst/>
+          </a:prstGeom>
+          <a:noFill/>
+        </p:spPr>
+        <p:txBody>
+          <a:bodyPr wrap="none">
+            <a:spAutoFit/>
+          </a:bodyPr>
+          <a:lstStyle/>
+          <a:p>
+            <a:r>
+              <a:rPr sz="1200" b="0">
                 <a:solidFill>
                   <a:srgbClr val="1F2933"/>
                 </a:solidFill>
@@ -7518,14 +8428,32 @@
               <a:t>• 실행 단계</a:t>
             </a:r>
           </a:p>
-          <a:p>
-            <a:pPr>
-              <a:spcAft>
-                <a:spcPts val="600"/>
-              </a:spcAft>
-            </a:pPr>
-            <a:r>
-              <a:rPr sz="1300" b="0">
+        </p:txBody>
+      </p:sp>
+      <p:sp>
+        <p:nvSpPr>
+          <p:cNvPr id="15" name="TextBox 14"/>
+          <p:cNvSpPr txBox="1"/>
+          <p:nvPr/>
+        </p:nvSpPr>
+        <p:spPr>
+          <a:xfrm>
+            <a:off x="868680" y="4005072"/>
+            <a:ext cx="4937760" cy="365760"/>
+          </a:xfrm>
+          <a:prstGeom prst="rect">
+            <a:avLst/>
+          </a:prstGeom>
+          <a:noFill/>
+        </p:spPr>
+        <p:txBody>
+          <a:bodyPr wrap="none">
+            <a:spAutoFit/>
+          </a:bodyPr>
+          <a:lstStyle/>
+          <a:p>
+            <a:r>
+              <a:rPr sz="1200" b="0">
                 <a:solidFill>
                   <a:srgbClr val="1F2933"/>
                 </a:solidFill>
@@ -7534,14 +8462,32 @@
               <a:t>• AI 보조 단계</a:t>
             </a:r>
           </a:p>
-          <a:p>
-            <a:pPr>
-              <a:spcAft>
-                <a:spcPts val="600"/>
-              </a:spcAft>
-            </a:pPr>
-            <a:r>
-              <a:rPr sz="1300" b="0">
+        </p:txBody>
+      </p:sp>
+      <p:sp>
+        <p:nvSpPr>
+          <p:cNvPr id="16" name="TextBox 15"/>
+          <p:cNvSpPr txBox="1"/>
+          <p:nvPr/>
+        </p:nvSpPr>
+        <p:spPr>
+          <a:xfrm>
+            <a:off x="868680" y="4425696"/>
+            <a:ext cx="4937760" cy="365760"/>
+          </a:xfrm>
+          <a:prstGeom prst="rect">
+            <a:avLst/>
+          </a:prstGeom>
+          <a:noFill/>
+        </p:spPr>
+        <p:txBody>
+          <a:bodyPr wrap="none">
+            <a:spAutoFit/>
+          </a:bodyPr>
+          <a:lstStyle/>
+          <a:p>
+            <a:r>
+              <a:rPr sz="1200" b="0">
                 <a:solidFill>
                   <a:srgbClr val="1F2933"/>
                 </a:solidFill>
@@ -7550,14 +8496,32 @@
               <a:t>• 사람 판단 단계</a:t>
             </a:r>
           </a:p>
-          <a:p>
-            <a:pPr>
-              <a:spcAft>
-                <a:spcPts val="600"/>
-              </a:spcAft>
-            </a:pPr>
-            <a:r>
-              <a:rPr sz="1300" b="0">
+        </p:txBody>
+      </p:sp>
+      <p:sp>
+        <p:nvSpPr>
+          <p:cNvPr id="17" name="TextBox 16"/>
+          <p:cNvSpPr txBox="1"/>
+          <p:nvPr/>
+        </p:nvSpPr>
+        <p:spPr>
+          <a:xfrm>
+            <a:off x="868680" y="4846320"/>
+            <a:ext cx="4937760" cy="365760"/>
+          </a:xfrm>
+          <a:prstGeom prst="rect">
+            <a:avLst/>
+          </a:prstGeom>
+          <a:noFill/>
+        </p:spPr>
+        <p:txBody>
+          <a:bodyPr wrap="none">
+            <a:spAutoFit/>
+          </a:bodyPr>
+          <a:lstStyle/>
+          <a:p>
+            <a:r>
+              <a:rPr sz="1200" b="0">
                 <a:solidFill>
                   <a:srgbClr val="1F2933"/>
                 </a:solidFill>
@@ -7566,14 +8530,32 @@
               <a:t>• 검토 기준</a:t>
             </a:r>
           </a:p>
-          <a:p>
-            <a:pPr>
-              <a:spcAft>
-                <a:spcPts val="600"/>
-              </a:spcAft>
-            </a:pPr>
-            <a:r>
-              <a:rPr sz="1300" b="0">
+        </p:txBody>
+      </p:sp>
+      <p:sp>
+        <p:nvSpPr>
+          <p:cNvPr id="18" name="TextBox 17"/>
+          <p:cNvSpPr txBox="1"/>
+          <p:nvPr/>
+        </p:nvSpPr>
+        <p:spPr>
+          <a:xfrm>
+            <a:off x="868680" y="5266944"/>
+            <a:ext cx="4937760" cy="365760"/>
+          </a:xfrm>
+          <a:prstGeom prst="rect">
+            <a:avLst/>
+          </a:prstGeom>
+          <a:noFill/>
+        </p:spPr>
+        <p:txBody>
+          <a:bodyPr wrap="none">
+            <a:spAutoFit/>
+          </a:bodyPr>
+          <a:lstStyle/>
+          <a:p>
+            <a:r>
+              <a:rPr sz="1200" b="0">
                 <a:solidFill>
                   <a:srgbClr val="1F2933"/>
                 </a:solidFill>
@@ -7582,14 +8564,32 @@
               <a:t>• 금지 업무</a:t>
             </a:r>
           </a:p>
-          <a:p>
-            <a:pPr>
-              <a:spcAft>
-                <a:spcPts val="600"/>
-              </a:spcAft>
-            </a:pPr>
-            <a:r>
-              <a:rPr sz="1300" b="0">
+        </p:txBody>
+      </p:sp>
+      <p:sp>
+        <p:nvSpPr>
+          <p:cNvPr id="19" name="TextBox 18"/>
+          <p:cNvSpPr txBox="1"/>
+          <p:nvPr/>
+        </p:nvSpPr>
+        <p:spPr>
+          <a:xfrm>
+            <a:off x="868680" y="5687568"/>
+            <a:ext cx="4937760" cy="365760"/>
+          </a:xfrm>
+          <a:prstGeom prst="rect">
+            <a:avLst/>
+          </a:prstGeom>
+          <a:noFill/>
+        </p:spPr>
+        <p:txBody>
+          <a:bodyPr wrap="none">
+            <a:spAutoFit/>
+          </a:bodyPr>
+          <a:lstStyle/>
+          <a:p>
+            <a:r>
+              <a:rPr sz="1200" b="0">
                 <a:solidFill>
                   <a:srgbClr val="1F2933"/>
                 </a:solidFill>
@@ -7598,14 +8598,32 @@
               <a:t>• 예외 목록</a:t>
             </a:r>
           </a:p>
-          <a:p>
-            <a:pPr>
-              <a:spcAft>
-                <a:spcPts val="600"/>
-              </a:spcAft>
-            </a:pPr>
-            <a:r>
-              <a:rPr sz="1300" b="0">
+        </p:txBody>
+      </p:sp>
+      <p:sp>
+        <p:nvSpPr>
+          <p:cNvPr id="20" name="TextBox 19"/>
+          <p:cNvSpPr txBox="1"/>
+          <p:nvPr/>
+        </p:nvSpPr>
+        <p:spPr>
+          <a:xfrm>
+            <a:off x="868680" y="6108192"/>
+            <a:ext cx="4937760" cy="365760"/>
+          </a:xfrm>
+          <a:prstGeom prst="rect">
+            <a:avLst/>
+          </a:prstGeom>
+          <a:noFill/>
+        </p:spPr>
+        <p:txBody>
+          <a:bodyPr wrap="none">
+            <a:spAutoFit/>
+          </a:bodyPr>
+          <a:lstStyle/>
+          <a:p>
+            <a:r>
+              <a:rPr sz="1200" b="0">
                 <a:solidFill>
                   <a:srgbClr val="1F2933"/>
                 </a:solidFill>
@@ -7618,14 +8636,502 @@
       </p:sp>
       <p:sp>
         <p:nvSpPr>
-          <p:cNvPr id="11" name="TextBox 10"/>
-          <p:cNvSpPr txBox="1"/>
-          <p:nvPr/>
-        </p:nvSpPr>
-        <p:spPr>
-          <a:xfrm>
-            <a:off x="6400800" y="2194560"/>
-            <a:ext cx="5212080" cy="2743200"/>
+          <p:cNvPr id="21" name="Rectangle 20"/>
+          <p:cNvSpPr/>
+          <p:nvPr/>
+        </p:nvSpPr>
+        <p:spPr>
+          <a:xfrm>
+            <a:off x="6263640" y="2148840"/>
+            <a:ext cx="5303520" cy="3291840"/>
+          </a:xfrm>
+          <a:prstGeom prst="rect">
+            <a:avLst/>
+          </a:prstGeom>
+          <a:solidFill>
+            <a:srgbClr val="F5F1E7"/>
+          </a:solidFill>
+          <a:ln w="19050">
+            <a:solidFill>
+              <a:srgbClr val="2F855A"/>
+            </a:solidFill>
+          </a:ln>
+          <a:effectLst/>
+        </p:spPr>
+        <p:style>
+          <a:lnRef idx="1">
+            <a:schemeClr val="accent1"/>
+          </a:lnRef>
+          <a:fillRef idx="3">
+            <a:schemeClr val="accent1"/>
+          </a:fillRef>
+          <a:effectRef idx="2">
+            <a:schemeClr val="accent1"/>
+          </a:effectRef>
+          <a:fontRef idx="minor">
+            <a:schemeClr val="lt1"/>
+          </a:fontRef>
+        </p:style>
+        <p:txBody>
+          <a:bodyPr rtlCol="0" anchor="ctr"/>
+          <a:lstStyle/>
+          <a:p>
+            <a:pPr algn="ctr"/>
+          </a:p>
+        </p:txBody>
+      </p:sp>
+      <p:sp>
+        <p:nvSpPr>
+          <p:cNvPr id="22" name="TextBox 21"/>
+          <p:cNvSpPr txBox="1"/>
+          <p:nvPr/>
+        </p:nvSpPr>
+        <p:spPr>
+          <a:xfrm>
+            <a:off x="6492240" y="2286000"/>
+            <a:ext cx="4846320" cy="365760"/>
+          </a:xfrm>
+          <a:prstGeom prst="rect">
+            <a:avLst/>
+          </a:prstGeom>
+          <a:noFill/>
+        </p:spPr>
+        <p:txBody>
+          <a:bodyPr wrap="none">
+            <a:spAutoFit/>
+          </a:bodyPr>
+          <a:lstStyle/>
+          <a:p>
+            <a:r>
+              <a:rPr sz="1500" b="1">
+                <a:solidFill>
+                  <a:srgbClr val="1F2933"/>
+                </a:solidFill>
+                <a:latin typeface="NanumSquareRound"/>
+              </a:rPr>
+              <a:t>실행 흐름</a:t>
+            </a:r>
+          </a:p>
+        </p:txBody>
+      </p:sp>
+      <p:sp>
+        <p:nvSpPr>
+          <p:cNvPr id="23" name="TextBox 22"/>
+          <p:cNvSpPr txBox="1"/>
+          <p:nvPr/>
+        </p:nvSpPr>
+        <p:spPr>
+          <a:xfrm>
+            <a:off x="6492240" y="2743200"/>
+            <a:ext cx="502920" cy="365760"/>
+          </a:xfrm>
+          <a:prstGeom prst="rect">
+            <a:avLst/>
+          </a:prstGeom>
+          <a:noFill/>
+        </p:spPr>
+        <p:txBody>
+          <a:bodyPr wrap="none">
+            <a:spAutoFit/>
+          </a:bodyPr>
+          <a:lstStyle/>
+          <a:p>
+            <a:r>
+              <a:rPr sz="1200" b="1">
+                <a:solidFill>
+                  <a:srgbClr val="2F855A"/>
+                </a:solidFill>
+                <a:latin typeface="NanumSquareRound"/>
+              </a:rPr>
+              <a:t>01</a:t>
+            </a:r>
+          </a:p>
+        </p:txBody>
+      </p:sp>
+      <p:sp>
+        <p:nvSpPr>
+          <p:cNvPr id="24" name="TextBox 23"/>
+          <p:cNvSpPr txBox="1"/>
+          <p:nvPr/>
+        </p:nvSpPr>
+        <p:spPr>
+          <a:xfrm>
+            <a:off x="7040880" y="2743200"/>
+            <a:ext cx="4297680" cy="365760"/>
+          </a:xfrm>
+          <a:prstGeom prst="rect">
+            <a:avLst/>
+          </a:prstGeom>
+          <a:noFill/>
+        </p:spPr>
+        <p:txBody>
+          <a:bodyPr wrap="none">
+            <a:spAutoFit/>
+          </a:bodyPr>
+          <a:lstStyle/>
+          <a:p>
+            <a:r>
+              <a:rPr sz="1200" b="0">
+                <a:solidFill>
+                  <a:srgbClr val="1F2933"/>
+                </a:solidFill>
+                <a:latin typeface="NanumSquareRound"/>
+              </a:rPr>
+              <a:t>반복업무 선정</a:t>
+            </a:r>
+          </a:p>
+        </p:txBody>
+      </p:sp>
+      <p:sp>
+        <p:nvSpPr>
+          <p:cNvPr id="25" name="TextBox 24"/>
+          <p:cNvSpPr txBox="1"/>
+          <p:nvPr/>
+        </p:nvSpPr>
+        <p:spPr>
+          <a:xfrm>
+            <a:off x="6492240" y="3163824"/>
+            <a:ext cx="502920" cy="365760"/>
+          </a:xfrm>
+          <a:prstGeom prst="rect">
+            <a:avLst/>
+          </a:prstGeom>
+          <a:noFill/>
+        </p:spPr>
+        <p:txBody>
+          <a:bodyPr wrap="none">
+            <a:spAutoFit/>
+          </a:bodyPr>
+          <a:lstStyle/>
+          <a:p>
+            <a:r>
+              <a:rPr sz="1200" b="1">
+                <a:solidFill>
+                  <a:srgbClr val="2F855A"/>
+                </a:solidFill>
+                <a:latin typeface="NanumSquareRound"/>
+              </a:rPr>
+              <a:t>02</a:t>
+            </a:r>
+          </a:p>
+        </p:txBody>
+      </p:sp>
+      <p:sp>
+        <p:nvSpPr>
+          <p:cNvPr id="26" name="TextBox 25"/>
+          <p:cNvSpPr txBox="1"/>
+          <p:nvPr/>
+        </p:nvSpPr>
+        <p:spPr>
+          <a:xfrm>
+            <a:off x="7040880" y="3163824"/>
+            <a:ext cx="4297680" cy="365760"/>
+          </a:xfrm>
+          <a:prstGeom prst="rect">
+            <a:avLst/>
+          </a:prstGeom>
+          <a:noFill/>
+        </p:spPr>
+        <p:txBody>
+          <a:bodyPr wrap="none">
+            <a:spAutoFit/>
+          </a:bodyPr>
+          <a:lstStyle/>
+          <a:p>
+            <a:r>
+              <a:rPr sz="1200" b="0">
+                <a:solidFill>
+                  <a:srgbClr val="1F2933"/>
+                </a:solidFill>
+                <a:latin typeface="NanumSquareRound"/>
+              </a:rPr>
+              <a:t>분석·설계</a:t>
+            </a:r>
+          </a:p>
+        </p:txBody>
+      </p:sp>
+      <p:sp>
+        <p:nvSpPr>
+          <p:cNvPr id="27" name="TextBox 26"/>
+          <p:cNvSpPr txBox="1"/>
+          <p:nvPr/>
+        </p:nvSpPr>
+        <p:spPr>
+          <a:xfrm>
+            <a:off x="6492240" y="3584448"/>
+            <a:ext cx="502920" cy="365760"/>
+          </a:xfrm>
+          <a:prstGeom prst="rect">
+            <a:avLst/>
+          </a:prstGeom>
+          <a:noFill/>
+        </p:spPr>
+        <p:txBody>
+          <a:bodyPr wrap="none">
+            <a:spAutoFit/>
+          </a:bodyPr>
+          <a:lstStyle/>
+          <a:p>
+            <a:r>
+              <a:rPr sz="1200" b="1">
+                <a:solidFill>
+                  <a:srgbClr val="2F855A"/>
+                </a:solidFill>
+                <a:latin typeface="NanumSquareRound"/>
+              </a:rPr>
+              <a:t>03</a:t>
+            </a:r>
+          </a:p>
+        </p:txBody>
+      </p:sp>
+      <p:sp>
+        <p:nvSpPr>
+          <p:cNvPr id="28" name="TextBox 27"/>
+          <p:cNvSpPr txBox="1"/>
+          <p:nvPr/>
+        </p:nvSpPr>
+        <p:spPr>
+          <a:xfrm>
+            <a:off x="7040880" y="3584448"/>
+            <a:ext cx="4297680" cy="365760"/>
+          </a:xfrm>
+          <a:prstGeom prst="rect">
+            <a:avLst/>
+          </a:prstGeom>
+          <a:noFill/>
+        </p:spPr>
+        <p:txBody>
+          <a:bodyPr wrap="none">
+            <a:spAutoFit/>
+          </a:bodyPr>
+          <a:lstStyle/>
+          <a:p>
+            <a:r>
+              <a:rPr sz="1200" b="0">
+                <a:solidFill>
+                  <a:srgbClr val="1F2933"/>
+                </a:solidFill>
+                <a:latin typeface="NanumSquareRound"/>
+              </a:rPr>
+              <a:t>합성 실행</a:t>
+            </a:r>
+          </a:p>
+        </p:txBody>
+      </p:sp>
+      <p:sp>
+        <p:nvSpPr>
+          <p:cNvPr id="29" name="TextBox 28"/>
+          <p:cNvSpPr txBox="1"/>
+          <p:nvPr/>
+        </p:nvSpPr>
+        <p:spPr>
+          <a:xfrm>
+            <a:off x="6492240" y="4005072"/>
+            <a:ext cx="502920" cy="365760"/>
+          </a:xfrm>
+          <a:prstGeom prst="rect">
+            <a:avLst/>
+          </a:prstGeom>
+          <a:noFill/>
+        </p:spPr>
+        <p:txBody>
+          <a:bodyPr wrap="none">
+            <a:spAutoFit/>
+          </a:bodyPr>
+          <a:lstStyle/>
+          <a:p>
+            <a:r>
+              <a:rPr sz="1200" b="1">
+                <a:solidFill>
+                  <a:srgbClr val="2F855A"/>
+                </a:solidFill>
+                <a:latin typeface="NanumSquareRound"/>
+              </a:rPr>
+              <a:t>04</a:t>
+            </a:r>
+          </a:p>
+        </p:txBody>
+      </p:sp>
+      <p:sp>
+        <p:nvSpPr>
+          <p:cNvPr id="30" name="TextBox 29"/>
+          <p:cNvSpPr txBox="1"/>
+          <p:nvPr/>
+        </p:nvSpPr>
+        <p:spPr>
+          <a:xfrm>
+            <a:off x="7040880" y="4005072"/>
+            <a:ext cx="4297680" cy="365760"/>
+          </a:xfrm>
+          <a:prstGeom prst="rect">
+            <a:avLst/>
+          </a:prstGeom>
+          <a:noFill/>
+        </p:spPr>
+        <p:txBody>
+          <a:bodyPr wrap="none">
+            <a:spAutoFit/>
+          </a:bodyPr>
+          <a:lstStyle/>
+          <a:p>
+            <a:r>
+              <a:rPr sz="1200" b="0">
+                <a:solidFill>
+                  <a:srgbClr val="1F2933"/>
+                </a:solidFill>
+                <a:latin typeface="NanumSquareRound"/>
+              </a:rPr>
+              <a:t>사람 검토·승인</a:t>
+            </a:r>
+          </a:p>
+        </p:txBody>
+      </p:sp>
+      <p:sp>
+        <p:nvSpPr>
+          <p:cNvPr id="31" name="TextBox 30"/>
+          <p:cNvSpPr txBox="1"/>
+          <p:nvPr/>
+        </p:nvSpPr>
+        <p:spPr>
+          <a:xfrm>
+            <a:off x="6492240" y="4425696"/>
+            <a:ext cx="502920" cy="365760"/>
+          </a:xfrm>
+          <a:prstGeom prst="rect">
+            <a:avLst/>
+          </a:prstGeom>
+          <a:noFill/>
+        </p:spPr>
+        <p:txBody>
+          <a:bodyPr wrap="none">
+            <a:spAutoFit/>
+          </a:bodyPr>
+          <a:lstStyle/>
+          <a:p>
+            <a:r>
+              <a:rPr sz="1200" b="1">
+                <a:solidFill>
+                  <a:srgbClr val="2F855A"/>
+                </a:solidFill>
+                <a:latin typeface="NanumSquareRound"/>
+              </a:rPr>
+              <a:t>05</a:t>
+            </a:r>
+          </a:p>
+        </p:txBody>
+      </p:sp>
+      <p:sp>
+        <p:nvSpPr>
+          <p:cNvPr id="32" name="TextBox 31"/>
+          <p:cNvSpPr txBox="1"/>
+          <p:nvPr/>
+        </p:nvSpPr>
+        <p:spPr>
+          <a:xfrm>
+            <a:off x="7040880" y="4425696"/>
+            <a:ext cx="4297680" cy="365760"/>
+          </a:xfrm>
+          <a:prstGeom prst="rect">
+            <a:avLst/>
+          </a:prstGeom>
+          <a:noFill/>
+        </p:spPr>
+        <p:txBody>
+          <a:bodyPr wrap="none">
+            <a:spAutoFit/>
+          </a:bodyPr>
+          <a:lstStyle/>
+          <a:p>
+            <a:r>
+              <a:rPr sz="1200" b="0">
+                <a:solidFill>
+                  <a:srgbClr val="1F2933"/>
+                </a:solidFill>
+                <a:latin typeface="NanumSquareRound"/>
+              </a:rPr>
+              <a:t>스킬 카드 납품</a:t>
+            </a:r>
+          </a:p>
+        </p:txBody>
+      </p:sp>
+      <p:sp>
+        <p:nvSpPr>
+          <p:cNvPr id="33" name="TextBox 32"/>
+          <p:cNvSpPr txBox="1"/>
+          <p:nvPr/>
+        </p:nvSpPr>
+        <p:spPr>
+          <a:xfrm>
+            <a:off x="6492240" y="4846320"/>
+            <a:ext cx="502920" cy="365760"/>
+          </a:xfrm>
+          <a:prstGeom prst="rect">
+            <a:avLst/>
+          </a:prstGeom>
+          <a:noFill/>
+        </p:spPr>
+        <p:txBody>
+          <a:bodyPr wrap="none">
+            <a:spAutoFit/>
+          </a:bodyPr>
+          <a:lstStyle/>
+          <a:p>
+            <a:r>
+              <a:rPr sz="1200" b="1">
+                <a:solidFill>
+                  <a:srgbClr val="2F855A"/>
+                </a:solidFill>
+                <a:latin typeface="NanumSquareRound"/>
+              </a:rPr>
+              <a:t>06</a:t>
+            </a:r>
+          </a:p>
+        </p:txBody>
+      </p:sp>
+      <p:sp>
+        <p:nvSpPr>
+          <p:cNvPr id="34" name="TextBox 33"/>
+          <p:cNvSpPr txBox="1"/>
+          <p:nvPr/>
+        </p:nvSpPr>
+        <p:spPr>
+          <a:xfrm>
+            <a:off x="7040880" y="4846320"/>
+            <a:ext cx="4297680" cy="365760"/>
+          </a:xfrm>
+          <a:prstGeom prst="rect">
+            <a:avLst/>
+          </a:prstGeom>
+          <a:noFill/>
+        </p:spPr>
+        <p:txBody>
+          <a:bodyPr wrap="none">
+            <a:spAutoFit/>
+          </a:bodyPr>
+          <a:lstStyle/>
+          <a:p>
+            <a:r>
+              <a:rPr sz="1200" b="0">
+                <a:solidFill>
+                  <a:srgbClr val="1F2933"/>
+                </a:solidFill>
+                <a:latin typeface="NanumSquareRound"/>
+              </a:rPr>
+              <a:t>분기 검토·버전 갱신</a:t>
+            </a:r>
+          </a:p>
+        </p:txBody>
+      </p:sp>
+      <p:sp>
+        <p:nvSpPr>
+          <p:cNvPr id="35" name="TextBox 34"/>
+          <p:cNvSpPr txBox="1"/>
+          <p:nvPr/>
+        </p:nvSpPr>
+        <p:spPr>
+          <a:xfrm>
+            <a:off x="640080" y="5623560"/>
+            <a:ext cx="10972800" cy="640080"/>
           </a:xfrm>
           <a:prstGeom prst="rect">
             <a:avLst/>
@@ -7857,8 +9363,8 @@
         </p:nvSpPr>
         <p:spPr>
           <a:xfrm>
-            <a:off x="640080" y="1234440"/>
-            <a:ext cx="3291840" cy="685800"/>
+            <a:off x="640080" y="1280160"/>
+            <a:ext cx="3291840" cy="640080"/>
           </a:xfrm>
           <a:prstGeom prst="rect">
             <a:avLst/>
@@ -7910,8 +9416,8 @@
         </p:nvSpPr>
         <p:spPr>
           <a:xfrm>
-            <a:off x="4069080" y="1234440"/>
-            <a:ext cx="3291840" cy="685800"/>
+            <a:off x="4069080" y="1280160"/>
+            <a:ext cx="3291840" cy="640080"/>
           </a:xfrm>
           <a:prstGeom prst="rect">
             <a:avLst/>
@@ -7963,8 +9469,8 @@
         </p:nvSpPr>
         <p:spPr>
           <a:xfrm>
-            <a:off x="7498079" y="1234440"/>
-            <a:ext cx="4023360" cy="685800"/>
+            <a:off x="7498079" y="1280160"/>
+            <a:ext cx="4023360" cy="640080"/>
           </a:xfrm>
           <a:prstGeom prst="rect">
             <a:avLst/>
@@ -8010,28 +9516,74 @@
       </p:sp>
       <p:sp>
         <p:nvSpPr>
-          <p:cNvPr id="10" name="TextBox 9"/>
-          <p:cNvSpPr txBox="1"/>
-          <p:nvPr/>
-        </p:nvSpPr>
-        <p:spPr>
-          <a:xfrm>
-            <a:off x="640080" y="2194560"/>
-            <a:ext cx="5120640" cy="3840480"/>
-          </a:xfrm>
-          <a:prstGeom prst="rect">
-            <a:avLst/>
-          </a:prstGeom>
-          <a:noFill/>
-        </p:spPr>
-        <p:txBody>
-          <a:bodyPr wrap="square">
-            <a:spAutoFit/>
-          </a:bodyPr>
-          <a:lstStyle/>
-          <a:p>
-            <a:r>
-              <a:rPr sz="1600" b="1">
+          <p:cNvPr id="10" name="Rectangle 9"/>
+          <p:cNvSpPr/>
+          <p:nvPr/>
+        </p:nvSpPr>
+        <p:spPr>
+          <a:xfrm>
+            <a:off x="640080" y="2148840"/>
+            <a:ext cx="5394960" cy="3291840"/>
+          </a:xfrm>
+          <a:prstGeom prst="rect">
+            <a:avLst/>
+          </a:prstGeom>
+          <a:solidFill>
+            <a:srgbClr val="F5F1E7"/>
+          </a:solidFill>
+          <a:ln w="19050">
+            <a:solidFill>
+              <a:srgbClr val="2B6CB0"/>
+            </a:solidFill>
+          </a:ln>
+          <a:effectLst/>
+        </p:spPr>
+        <p:style>
+          <a:lnRef idx="1">
+            <a:schemeClr val="accent1"/>
+          </a:lnRef>
+          <a:fillRef idx="3">
+            <a:schemeClr val="accent1"/>
+          </a:fillRef>
+          <a:effectRef idx="2">
+            <a:schemeClr val="accent1"/>
+          </a:effectRef>
+          <a:fontRef idx="minor">
+            <a:schemeClr val="lt1"/>
+          </a:fontRef>
+        </p:style>
+        <p:txBody>
+          <a:bodyPr rtlCol="0" anchor="ctr"/>
+          <a:lstStyle/>
+          <a:p>
+            <a:pPr algn="ctr"/>
+          </a:p>
+        </p:txBody>
+      </p:sp>
+      <p:sp>
+        <p:nvSpPr>
+          <p:cNvPr id="11" name="TextBox 10"/>
+          <p:cNvSpPr txBox="1"/>
+          <p:nvPr/>
+        </p:nvSpPr>
+        <p:spPr>
+          <a:xfrm>
+            <a:off x="868680" y="2286000"/>
+            <a:ext cx="4937760" cy="365760"/>
+          </a:xfrm>
+          <a:prstGeom prst="rect">
+            <a:avLst/>
+          </a:prstGeom>
+          <a:noFill/>
+        </p:spPr>
+        <p:txBody>
+          <a:bodyPr wrap="none">
+            <a:spAutoFit/>
+          </a:bodyPr>
+          <a:lstStyle/>
+          <a:p>
+            <a:r>
+              <a:rPr sz="1500" b="1">
                 <a:solidFill>
                   <a:srgbClr val="1F2933"/>
                 </a:solidFill>
@@ -8040,14 +9592,32 @@
               <a:t>산출물</a:t>
             </a:r>
           </a:p>
-          <a:p>
-            <a:pPr>
-              <a:spcAft>
-                <a:spcPts val="600"/>
-              </a:spcAft>
-            </a:pPr>
-            <a:r>
-              <a:rPr sz="1300" b="0">
+        </p:txBody>
+      </p:sp>
+      <p:sp>
+        <p:nvSpPr>
+          <p:cNvPr id="12" name="TextBox 11"/>
+          <p:cNvSpPr txBox="1"/>
+          <p:nvPr/>
+        </p:nvSpPr>
+        <p:spPr>
+          <a:xfrm>
+            <a:off x="868680" y="2743200"/>
+            <a:ext cx="4937760" cy="365760"/>
+          </a:xfrm>
+          <a:prstGeom prst="rect">
+            <a:avLst/>
+          </a:prstGeom>
+          <a:noFill/>
+        </p:spPr>
+        <p:txBody>
+          <a:bodyPr wrap="none">
+            <a:spAutoFit/>
+          </a:bodyPr>
+          <a:lstStyle/>
+          <a:p>
+            <a:r>
+              <a:rPr sz="1200" b="0">
                 <a:solidFill>
                   <a:srgbClr val="1F2933"/>
                 </a:solidFill>
@@ -8056,14 +9626,32 @@
               <a:t>• 업무 분석</a:t>
             </a:r>
           </a:p>
-          <a:p>
-            <a:pPr>
-              <a:spcAft>
-                <a:spcPts val="600"/>
-              </a:spcAft>
-            </a:pPr>
-            <a:r>
-              <a:rPr sz="1300" b="0">
+        </p:txBody>
+      </p:sp>
+      <p:sp>
+        <p:nvSpPr>
+          <p:cNvPr id="13" name="TextBox 12"/>
+          <p:cNvSpPr txBox="1"/>
+          <p:nvPr/>
+        </p:nvSpPr>
+        <p:spPr>
+          <a:xfrm>
+            <a:off x="868680" y="3163824"/>
+            <a:ext cx="4937760" cy="365760"/>
+          </a:xfrm>
+          <a:prstGeom prst="rect">
+            <a:avLst/>
+          </a:prstGeom>
+          <a:noFill/>
+        </p:spPr>
+        <p:txBody>
+          <a:bodyPr wrap="none">
+            <a:spAutoFit/>
+          </a:bodyPr>
+          <a:lstStyle/>
+          <a:p>
+            <a:r>
+              <a:rPr sz="1200" b="0">
                 <a:solidFill>
                   <a:srgbClr val="1F2933"/>
                 </a:solidFill>
@@ -8072,14 +9660,32 @@
               <a:t>• 합성 실행</a:t>
             </a:r>
           </a:p>
-          <a:p>
-            <a:pPr>
-              <a:spcAft>
-                <a:spcPts val="600"/>
-              </a:spcAft>
-            </a:pPr>
-            <a:r>
-              <a:rPr sz="1300" b="0">
+        </p:txBody>
+      </p:sp>
+      <p:sp>
+        <p:nvSpPr>
+          <p:cNvPr id="14" name="TextBox 13"/>
+          <p:cNvSpPr txBox="1"/>
+          <p:nvPr/>
+        </p:nvSpPr>
+        <p:spPr>
+          <a:xfrm>
+            <a:off x="868680" y="3584448"/>
+            <a:ext cx="4937760" cy="365760"/>
+          </a:xfrm>
+          <a:prstGeom prst="rect">
+            <a:avLst/>
+          </a:prstGeom>
+          <a:noFill/>
+        </p:spPr>
+        <p:txBody>
+          <a:bodyPr wrap="none">
+            <a:spAutoFit/>
+          </a:bodyPr>
+          <a:lstStyle/>
+          <a:p>
+            <a:r>
+              <a:rPr sz="1200" b="0">
                 <a:solidFill>
                   <a:srgbClr val="1F2933"/>
                 </a:solidFill>
@@ -8088,14 +9694,32 @@
               <a:t>• 증거 요구사항</a:t>
             </a:r>
           </a:p>
-          <a:p>
-            <a:pPr>
-              <a:spcAft>
-                <a:spcPts val="600"/>
-              </a:spcAft>
-            </a:pPr>
-            <a:r>
-              <a:rPr sz="1300" b="0">
+        </p:txBody>
+      </p:sp>
+      <p:sp>
+        <p:nvSpPr>
+          <p:cNvPr id="15" name="TextBox 14"/>
+          <p:cNvSpPr txBox="1"/>
+          <p:nvPr/>
+        </p:nvSpPr>
+        <p:spPr>
+          <a:xfrm>
+            <a:off x="868680" y="4005072"/>
+            <a:ext cx="4937760" cy="365760"/>
+          </a:xfrm>
+          <a:prstGeom prst="rect">
+            <a:avLst/>
+          </a:prstGeom>
+          <a:noFill/>
+        </p:spPr>
+        <p:txBody>
+          <a:bodyPr wrap="none">
+            <a:spAutoFit/>
+          </a:bodyPr>
+          <a:lstStyle/>
+          <a:p>
+            <a:r>
+              <a:rPr sz="1200" b="0">
                 <a:solidFill>
                   <a:srgbClr val="1F2933"/>
                 </a:solidFill>
@@ -8104,14 +9728,32 @@
               <a:t>• 누락·충돌 처리</a:t>
             </a:r>
           </a:p>
-          <a:p>
-            <a:pPr>
-              <a:spcAft>
-                <a:spcPts val="600"/>
-              </a:spcAft>
-            </a:pPr>
-            <a:r>
-              <a:rPr sz="1300" b="0">
+        </p:txBody>
+      </p:sp>
+      <p:sp>
+        <p:nvSpPr>
+          <p:cNvPr id="16" name="TextBox 15"/>
+          <p:cNvSpPr txBox="1"/>
+          <p:nvPr/>
+        </p:nvSpPr>
+        <p:spPr>
+          <a:xfrm>
+            <a:off x="868680" y="4425696"/>
+            <a:ext cx="4937760" cy="365760"/>
+          </a:xfrm>
+          <a:prstGeom prst="rect">
+            <a:avLst/>
+          </a:prstGeom>
+          <a:noFill/>
+        </p:spPr>
+        <p:txBody>
+          <a:bodyPr wrap="none">
+            <a:spAutoFit/>
+          </a:bodyPr>
+          <a:lstStyle/>
+          <a:p>
+            <a:r>
+              <a:rPr sz="1200" b="0">
                 <a:solidFill>
                   <a:srgbClr val="1F2933"/>
                 </a:solidFill>
@@ -8120,14 +9762,32 @@
               <a:t>• 실행자·검토자 역할</a:t>
             </a:r>
           </a:p>
-          <a:p>
-            <a:pPr>
-              <a:spcAft>
-                <a:spcPts val="600"/>
-              </a:spcAft>
-            </a:pPr>
-            <a:r>
-              <a:rPr sz="1300" b="0">
+        </p:txBody>
+      </p:sp>
+      <p:sp>
+        <p:nvSpPr>
+          <p:cNvPr id="17" name="TextBox 16"/>
+          <p:cNvSpPr txBox="1"/>
+          <p:nvPr/>
+        </p:nvSpPr>
+        <p:spPr>
+          <a:xfrm>
+            <a:off x="868680" y="4846320"/>
+            <a:ext cx="4937760" cy="365760"/>
+          </a:xfrm>
+          <a:prstGeom prst="rect">
+            <a:avLst/>
+          </a:prstGeom>
+          <a:noFill/>
+        </p:spPr>
+        <p:txBody>
+          <a:bodyPr wrap="none">
+            <a:spAutoFit/>
+          </a:bodyPr>
+          <a:lstStyle/>
+          <a:p>
+            <a:r>
+              <a:rPr sz="1200" b="0">
                 <a:solidFill>
                   <a:srgbClr val="1F2933"/>
                 </a:solidFill>
@@ -8136,14 +9796,32 @@
               <a:t>• 수정·재실행</a:t>
             </a:r>
           </a:p>
-          <a:p>
-            <a:pPr>
-              <a:spcAft>
-                <a:spcPts val="600"/>
-              </a:spcAft>
-            </a:pPr>
-            <a:r>
-              <a:rPr sz="1300" b="0">
+        </p:txBody>
+      </p:sp>
+      <p:sp>
+        <p:nvSpPr>
+          <p:cNvPr id="18" name="TextBox 17"/>
+          <p:cNvSpPr txBox="1"/>
+          <p:nvPr/>
+        </p:nvSpPr>
+        <p:spPr>
+          <a:xfrm>
+            <a:off x="868680" y="5266944"/>
+            <a:ext cx="4937760" cy="365760"/>
+          </a:xfrm>
+          <a:prstGeom prst="rect">
+            <a:avLst/>
+          </a:prstGeom>
+          <a:noFill/>
+        </p:spPr>
+        <p:txBody>
+          <a:bodyPr wrap="none">
+            <a:spAutoFit/>
+          </a:bodyPr>
+          <a:lstStyle/>
+          <a:p>
+            <a:r>
+              <a:rPr sz="1200" b="0">
                 <a:solidFill>
                   <a:srgbClr val="1F2933"/>
                 </a:solidFill>
@@ -8152,14 +9830,32 @@
               <a:t>• 최종 승인 기준</a:t>
             </a:r>
           </a:p>
-          <a:p>
-            <a:pPr>
-              <a:spcAft>
-                <a:spcPts val="600"/>
-              </a:spcAft>
-            </a:pPr>
-            <a:r>
-              <a:rPr sz="1300" b="0">
+        </p:txBody>
+      </p:sp>
+      <p:sp>
+        <p:nvSpPr>
+          <p:cNvPr id="19" name="TextBox 18"/>
+          <p:cNvSpPr txBox="1"/>
+          <p:nvPr/>
+        </p:nvSpPr>
+        <p:spPr>
+          <a:xfrm>
+            <a:off x="868680" y="5687568"/>
+            <a:ext cx="4937760" cy="365760"/>
+          </a:xfrm>
+          <a:prstGeom prst="rect">
+            <a:avLst/>
+          </a:prstGeom>
+          <a:noFill/>
+        </p:spPr>
+        <p:txBody>
+          <a:bodyPr wrap="none">
+            <a:spAutoFit/>
+          </a:bodyPr>
+          <a:lstStyle/>
+          <a:p>
+            <a:r>
+              <a:rPr sz="1200" b="0">
                 <a:solidFill>
                   <a:srgbClr val="1F2933"/>
                 </a:solidFill>
@@ -8168,14 +9864,32 @@
               <a:t>• 검증된 스킬 카드</a:t>
             </a:r>
           </a:p>
-          <a:p>
-            <a:pPr>
-              <a:spcAft>
-                <a:spcPts val="600"/>
-              </a:spcAft>
-            </a:pPr>
-            <a:r>
-              <a:rPr sz="1300" b="0">
+        </p:txBody>
+      </p:sp>
+      <p:sp>
+        <p:nvSpPr>
+          <p:cNvPr id="20" name="TextBox 19"/>
+          <p:cNvSpPr txBox="1"/>
+          <p:nvPr/>
+        </p:nvSpPr>
+        <p:spPr>
+          <a:xfrm>
+            <a:off x="868680" y="6108192"/>
+            <a:ext cx="4937760" cy="365760"/>
+          </a:xfrm>
+          <a:prstGeom prst="rect">
+            <a:avLst/>
+          </a:prstGeom>
+          <a:noFill/>
+        </p:spPr>
+        <p:txBody>
+          <a:bodyPr wrap="none">
+            <a:spAutoFit/>
+          </a:bodyPr>
+          <a:lstStyle/>
+          <a:p>
+            <a:r>
+              <a:rPr sz="1200" b="0">
                 <a:solidFill>
                   <a:srgbClr val="1F2933"/>
                 </a:solidFill>
@@ -8188,14 +9902,502 @@
       </p:sp>
       <p:sp>
         <p:nvSpPr>
-          <p:cNvPr id="11" name="TextBox 10"/>
-          <p:cNvSpPr txBox="1"/>
-          <p:nvPr/>
-        </p:nvSpPr>
-        <p:spPr>
-          <a:xfrm>
-            <a:off x="6400800" y="2194560"/>
-            <a:ext cx="5212080" cy="2743200"/>
+          <p:cNvPr id="21" name="Rectangle 20"/>
+          <p:cNvSpPr/>
+          <p:nvPr/>
+        </p:nvSpPr>
+        <p:spPr>
+          <a:xfrm>
+            <a:off x="6263640" y="2148840"/>
+            <a:ext cx="5303520" cy="3291840"/>
+          </a:xfrm>
+          <a:prstGeom prst="rect">
+            <a:avLst/>
+          </a:prstGeom>
+          <a:solidFill>
+            <a:srgbClr val="F5F1E7"/>
+          </a:solidFill>
+          <a:ln w="19050">
+            <a:solidFill>
+              <a:srgbClr val="2F855A"/>
+            </a:solidFill>
+          </a:ln>
+          <a:effectLst/>
+        </p:spPr>
+        <p:style>
+          <a:lnRef idx="1">
+            <a:schemeClr val="accent1"/>
+          </a:lnRef>
+          <a:fillRef idx="3">
+            <a:schemeClr val="accent1"/>
+          </a:fillRef>
+          <a:effectRef idx="2">
+            <a:schemeClr val="accent1"/>
+          </a:effectRef>
+          <a:fontRef idx="minor">
+            <a:schemeClr val="lt1"/>
+          </a:fontRef>
+        </p:style>
+        <p:txBody>
+          <a:bodyPr rtlCol="0" anchor="ctr"/>
+          <a:lstStyle/>
+          <a:p>
+            <a:pPr algn="ctr"/>
+          </a:p>
+        </p:txBody>
+      </p:sp>
+      <p:sp>
+        <p:nvSpPr>
+          <p:cNvPr id="22" name="TextBox 21"/>
+          <p:cNvSpPr txBox="1"/>
+          <p:nvPr/>
+        </p:nvSpPr>
+        <p:spPr>
+          <a:xfrm>
+            <a:off x="6492240" y="2286000"/>
+            <a:ext cx="4846320" cy="365760"/>
+          </a:xfrm>
+          <a:prstGeom prst="rect">
+            <a:avLst/>
+          </a:prstGeom>
+          <a:noFill/>
+        </p:spPr>
+        <p:txBody>
+          <a:bodyPr wrap="none">
+            <a:spAutoFit/>
+          </a:bodyPr>
+          <a:lstStyle/>
+          <a:p>
+            <a:r>
+              <a:rPr sz="1500" b="1">
+                <a:solidFill>
+                  <a:srgbClr val="1F2933"/>
+                </a:solidFill>
+                <a:latin typeface="NanumSquareRound"/>
+              </a:rPr>
+              <a:t>실행 흐름</a:t>
+            </a:r>
+          </a:p>
+        </p:txBody>
+      </p:sp>
+      <p:sp>
+        <p:nvSpPr>
+          <p:cNvPr id="23" name="TextBox 22"/>
+          <p:cNvSpPr txBox="1"/>
+          <p:nvPr/>
+        </p:nvSpPr>
+        <p:spPr>
+          <a:xfrm>
+            <a:off x="6492240" y="2743200"/>
+            <a:ext cx="502920" cy="365760"/>
+          </a:xfrm>
+          <a:prstGeom prst="rect">
+            <a:avLst/>
+          </a:prstGeom>
+          <a:noFill/>
+        </p:spPr>
+        <p:txBody>
+          <a:bodyPr wrap="none">
+            <a:spAutoFit/>
+          </a:bodyPr>
+          <a:lstStyle/>
+          <a:p>
+            <a:r>
+              <a:rPr sz="1200" b="1">
+                <a:solidFill>
+                  <a:srgbClr val="2F855A"/>
+                </a:solidFill>
+                <a:latin typeface="NanumSquareRound"/>
+              </a:rPr>
+              <a:t>01</a:t>
+            </a:r>
+          </a:p>
+        </p:txBody>
+      </p:sp>
+      <p:sp>
+        <p:nvSpPr>
+          <p:cNvPr id="24" name="TextBox 23"/>
+          <p:cNvSpPr txBox="1"/>
+          <p:nvPr/>
+        </p:nvSpPr>
+        <p:spPr>
+          <a:xfrm>
+            <a:off x="7040880" y="2743200"/>
+            <a:ext cx="4297680" cy="365760"/>
+          </a:xfrm>
+          <a:prstGeom prst="rect">
+            <a:avLst/>
+          </a:prstGeom>
+          <a:noFill/>
+        </p:spPr>
+        <p:txBody>
+          <a:bodyPr wrap="none">
+            <a:spAutoFit/>
+          </a:bodyPr>
+          <a:lstStyle/>
+          <a:p>
+            <a:r>
+              <a:rPr sz="1200" b="0">
+                <a:solidFill>
+                  <a:srgbClr val="1F2933"/>
+                </a:solidFill>
+                <a:latin typeface="NanumSquareRound"/>
+              </a:rPr>
+              <a:t>반복업무 선정</a:t>
+            </a:r>
+          </a:p>
+        </p:txBody>
+      </p:sp>
+      <p:sp>
+        <p:nvSpPr>
+          <p:cNvPr id="25" name="TextBox 24"/>
+          <p:cNvSpPr txBox="1"/>
+          <p:nvPr/>
+        </p:nvSpPr>
+        <p:spPr>
+          <a:xfrm>
+            <a:off x="6492240" y="3163824"/>
+            <a:ext cx="502920" cy="365760"/>
+          </a:xfrm>
+          <a:prstGeom prst="rect">
+            <a:avLst/>
+          </a:prstGeom>
+          <a:noFill/>
+        </p:spPr>
+        <p:txBody>
+          <a:bodyPr wrap="none">
+            <a:spAutoFit/>
+          </a:bodyPr>
+          <a:lstStyle/>
+          <a:p>
+            <a:r>
+              <a:rPr sz="1200" b="1">
+                <a:solidFill>
+                  <a:srgbClr val="2F855A"/>
+                </a:solidFill>
+                <a:latin typeface="NanumSquareRound"/>
+              </a:rPr>
+              <a:t>02</a:t>
+            </a:r>
+          </a:p>
+        </p:txBody>
+      </p:sp>
+      <p:sp>
+        <p:nvSpPr>
+          <p:cNvPr id="26" name="TextBox 25"/>
+          <p:cNvSpPr txBox="1"/>
+          <p:nvPr/>
+        </p:nvSpPr>
+        <p:spPr>
+          <a:xfrm>
+            <a:off x="7040880" y="3163824"/>
+            <a:ext cx="4297680" cy="365760"/>
+          </a:xfrm>
+          <a:prstGeom prst="rect">
+            <a:avLst/>
+          </a:prstGeom>
+          <a:noFill/>
+        </p:spPr>
+        <p:txBody>
+          <a:bodyPr wrap="none">
+            <a:spAutoFit/>
+          </a:bodyPr>
+          <a:lstStyle/>
+          <a:p>
+            <a:r>
+              <a:rPr sz="1200" b="0">
+                <a:solidFill>
+                  <a:srgbClr val="1F2933"/>
+                </a:solidFill>
+                <a:latin typeface="NanumSquareRound"/>
+              </a:rPr>
+              <a:t>분석·설계</a:t>
+            </a:r>
+          </a:p>
+        </p:txBody>
+      </p:sp>
+      <p:sp>
+        <p:nvSpPr>
+          <p:cNvPr id="27" name="TextBox 26"/>
+          <p:cNvSpPr txBox="1"/>
+          <p:nvPr/>
+        </p:nvSpPr>
+        <p:spPr>
+          <a:xfrm>
+            <a:off x="6492240" y="3584448"/>
+            <a:ext cx="502920" cy="365760"/>
+          </a:xfrm>
+          <a:prstGeom prst="rect">
+            <a:avLst/>
+          </a:prstGeom>
+          <a:noFill/>
+        </p:spPr>
+        <p:txBody>
+          <a:bodyPr wrap="none">
+            <a:spAutoFit/>
+          </a:bodyPr>
+          <a:lstStyle/>
+          <a:p>
+            <a:r>
+              <a:rPr sz="1200" b="1">
+                <a:solidFill>
+                  <a:srgbClr val="2F855A"/>
+                </a:solidFill>
+                <a:latin typeface="NanumSquareRound"/>
+              </a:rPr>
+              <a:t>03</a:t>
+            </a:r>
+          </a:p>
+        </p:txBody>
+      </p:sp>
+      <p:sp>
+        <p:nvSpPr>
+          <p:cNvPr id="28" name="TextBox 27"/>
+          <p:cNvSpPr txBox="1"/>
+          <p:nvPr/>
+        </p:nvSpPr>
+        <p:spPr>
+          <a:xfrm>
+            <a:off x="7040880" y="3584448"/>
+            <a:ext cx="4297680" cy="365760"/>
+          </a:xfrm>
+          <a:prstGeom prst="rect">
+            <a:avLst/>
+          </a:prstGeom>
+          <a:noFill/>
+        </p:spPr>
+        <p:txBody>
+          <a:bodyPr wrap="none">
+            <a:spAutoFit/>
+          </a:bodyPr>
+          <a:lstStyle/>
+          <a:p>
+            <a:r>
+              <a:rPr sz="1200" b="0">
+                <a:solidFill>
+                  <a:srgbClr val="1F2933"/>
+                </a:solidFill>
+                <a:latin typeface="NanumSquareRound"/>
+              </a:rPr>
+              <a:t>합성 실행</a:t>
+            </a:r>
+          </a:p>
+        </p:txBody>
+      </p:sp>
+      <p:sp>
+        <p:nvSpPr>
+          <p:cNvPr id="29" name="TextBox 28"/>
+          <p:cNvSpPr txBox="1"/>
+          <p:nvPr/>
+        </p:nvSpPr>
+        <p:spPr>
+          <a:xfrm>
+            <a:off x="6492240" y="4005072"/>
+            <a:ext cx="502920" cy="365760"/>
+          </a:xfrm>
+          <a:prstGeom prst="rect">
+            <a:avLst/>
+          </a:prstGeom>
+          <a:noFill/>
+        </p:spPr>
+        <p:txBody>
+          <a:bodyPr wrap="none">
+            <a:spAutoFit/>
+          </a:bodyPr>
+          <a:lstStyle/>
+          <a:p>
+            <a:r>
+              <a:rPr sz="1200" b="1">
+                <a:solidFill>
+                  <a:srgbClr val="2F855A"/>
+                </a:solidFill>
+                <a:latin typeface="NanumSquareRound"/>
+              </a:rPr>
+              <a:t>04</a:t>
+            </a:r>
+          </a:p>
+        </p:txBody>
+      </p:sp>
+      <p:sp>
+        <p:nvSpPr>
+          <p:cNvPr id="30" name="TextBox 29"/>
+          <p:cNvSpPr txBox="1"/>
+          <p:nvPr/>
+        </p:nvSpPr>
+        <p:spPr>
+          <a:xfrm>
+            <a:off x="7040880" y="4005072"/>
+            <a:ext cx="4297680" cy="365760"/>
+          </a:xfrm>
+          <a:prstGeom prst="rect">
+            <a:avLst/>
+          </a:prstGeom>
+          <a:noFill/>
+        </p:spPr>
+        <p:txBody>
+          <a:bodyPr wrap="none">
+            <a:spAutoFit/>
+          </a:bodyPr>
+          <a:lstStyle/>
+          <a:p>
+            <a:r>
+              <a:rPr sz="1200" b="0">
+                <a:solidFill>
+                  <a:srgbClr val="1F2933"/>
+                </a:solidFill>
+                <a:latin typeface="NanumSquareRound"/>
+              </a:rPr>
+              <a:t>사람 검토·승인</a:t>
+            </a:r>
+          </a:p>
+        </p:txBody>
+      </p:sp>
+      <p:sp>
+        <p:nvSpPr>
+          <p:cNvPr id="31" name="TextBox 30"/>
+          <p:cNvSpPr txBox="1"/>
+          <p:nvPr/>
+        </p:nvSpPr>
+        <p:spPr>
+          <a:xfrm>
+            <a:off x="6492240" y="4425696"/>
+            <a:ext cx="502920" cy="365760"/>
+          </a:xfrm>
+          <a:prstGeom prst="rect">
+            <a:avLst/>
+          </a:prstGeom>
+          <a:noFill/>
+        </p:spPr>
+        <p:txBody>
+          <a:bodyPr wrap="none">
+            <a:spAutoFit/>
+          </a:bodyPr>
+          <a:lstStyle/>
+          <a:p>
+            <a:r>
+              <a:rPr sz="1200" b="1">
+                <a:solidFill>
+                  <a:srgbClr val="2F855A"/>
+                </a:solidFill>
+                <a:latin typeface="NanumSquareRound"/>
+              </a:rPr>
+              <a:t>05</a:t>
+            </a:r>
+          </a:p>
+        </p:txBody>
+      </p:sp>
+      <p:sp>
+        <p:nvSpPr>
+          <p:cNvPr id="32" name="TextBox 31"/>
+          <p:cNvSpPr txBox="1"/>
+          <p:nvPr/>
+        </p:nvSpPr>
+        <p:spPr>
+          <a:xfrm>
+            <a:off x="7040880" y="4425696"/>
+            <a:ext cx="4297680" cy="365760"/>
+          </a:xfrm>
+          <a:prstGeom prst="rect">
+            <a:avLst/>
+          </a:prstGeom>
+          <a:noFill/>
+        </p:spPr>
+        <p:txBody>
+          <a:bodyPr wrap="none">
+            <a:spAutoFit/>
+          </a:bodyPr>
+          <a:lstStyle/>
+          <a:p>
+            <a:r>
+              <a:rPr sz="1200" b="0">
+                <a:solidFill>
+                  <a:srgbClr val="1F2933"/>
+                </a:solidFill>
+                <a:latin typeface="NanumSquareRound"/>
+              </a:rPr>
+              <a:t>스킬 카드 납품</a:t>
+            </a:r>
+          </a:p>
+        </p:txBody>
+      </p:sp>
+      <p:sp>
+        <p:nvSpPr>
+          <p:cNvPr id="33" name="TextBox 32"/>
+          <p:cNvSpPr txBox="1"/>
+          <p:nvPr/>
+        </p:nvSpPr>
+        <p:spPr>
+          <a:xfrm>
+            <a:off x="6492240" y="4846320"/>
+            <a:ext cx="502920" cy="365760"/>
+          </a:xfrm>
+          <a:prstGeom prst="rect">
+            <a:avLst/>
+          </a:prstGeom>
+          <a:noFill/>
+        </p:spPr>
+        <p:txBody>
+          <a:bodyPr wrap="none">
+            <a:spAutoFit/>
+          </a:bodyPr>
+          <a:lstStyle/>
+          <a:p>
+            <a:r>
+              <a:rPr sz="1200" b="1">
+                <a:solidFill>
+                  <a:srgbClr val="2F855A"/>
+                </a:solidFill>
+                <a:latin typeface="NanumSquareRound"/>
+              </a:rPr>
+              <a:t>06</a:t>
+            </a:r>
+          </a:p>
+        </p:txBody>
+      </p:sp>
+      <p:sp>
+        <p:nvSpPr>
+          <p:cNvPr id="34" name="TextBox 33"/>
+          <p:cNvSpPr txBox="1"/>
+          <p:nvPr/>
+        </p:nvSpPr>
+        <p:spPr>
+          <a:xfrm>
+            <a:off x="7040880" y="4846320"/>
+            <a:ext cx="4297680" cy="365760"/>
+          </a:xfrm>
+          <a:prstGeom prst="rect">
+            <a:avLst/>
+          </a:prstGeom>
+          <a:noFill/>
+        </p:spPr>
+        <p:txBody>
+          <a:bodyPr wrap="none">
+            <a:spAutoFit/>
+          </a:bodyPr>
+          <a:lstStyle/>
+          <a:p>
+            <a:r>
+              <a:rPr sz="1200" b="0">
+                <a:solidFill>
+                  <a:srgbClr val="1F2933"/>
+                </a:solidFill>
+                <a:latin typeface="NanumSquareRound"/>
+              </a:rPr>
+              <a:t>분기 검토·버전 갱신</a:t>
+            </a:r>
+          </a:p>
+        </p:txBody>
+      </p:sp>
+      <p:sp>
+        <p:nvSpPr>
+          <p:cNvPr id="35" name="TextBox 34"/>
+          <p:cNvSpPr txBox="1"/>
+          <p:nvPr/>
+        </p:nvSpPr>
+        <p:spPr>
+          <a:xfrm>
+            <a:off x="640080" y="5623560"/>
+            <a:ext cx="10972800" cy="640080"/>
           </a:xfrm>
           <a:prstGeom prst="rect">
             <a:avLst/>
@@ -8427,8 +10629,8 @@
         </p:nvSpPr>
         <p:spPr>
           <a:xfrm>
-            <a:off x="640080" y="1234440"/>
-            <a:ext cx="3291840" cy="685800"/>
+            <a:off x="640080" y="1280160"/>
+            <a:ext cx="3291840" cy="640080"/>
           </a:xfrm>
           <a:prstGeom prst="rect">
             <a:avLst/>
@@ -8480,8 +10682,8 @@
         </p:nvSpPr>
         <p:spPr>
           <a:xfrm>
-            <a:off x="4069080" y="1234440"/>
-            <a:ext cx="3291840" cy="685800"/>
+            <a:off x="4069080" y="1280160"/>
+            <a:ext cx="3291840" cy="640080"/>
           </a:xfrm>
           <a:prstGeom prst="rect">
             <a:avLst/>
@@ -8533,8 +10735,8 @@
         </p:nvSpPr>
         <p:spPr>
           <a:xfrm>
-            <a:off x="7498079" y="1234440"/>
-            <a:ext cx="4023360" cy="685800"/>
+            <a:off x="7498079" y="1280160"/>
+            <a:ext cx="4023360" cy="640080"/>
           </a:xfrm>
           <a:prstGeom prst="rect">
             <a:avLst/>
@@ -8580,28 +10782,74 @@
       </p:sp>
       <p:sp>
         <p:nvSpPr>
-          <p:cNvPr id="10" name="TextBox 9"/>
-          <p:cNvSpPr txBox="1"/>
-          <p:nvPr/>
-        </p:nvSpPr>
-        <p:spPr>
-          <a:xfrm>
-            <a:off x="640080" y="2194560"/>
-            <a:ext cx="5120640" cy="3840480"/>
-          </a:xfrm>
-          <a:prstGeom prst="rect">
-            <a:avLst/>
-          </a:prstGeom>
-          <a:noFill/>
-        </p:spPr>
-        <p:txBody>
-          <a:bodyPr wrap="square">
-            <a:spAutoFit/>
-          </a:bodyPr>
-          <a:lstStyle/>
-          <a:p>
-            <a:r>
-              <a:rPr sz="1600" b="1">
+          <p:cNvPr id="10" name="Rectangle 9"/>
+          <p:cNvSpPr/>
+          <p:nvPr/>
+        </p:nvSpPr>
+        <p:spPr>
+          <a:xfrm>
+            <a:off x="640080" y="2148840"/>
+            <a:ext cx="5394960" cy="3291840"/>
+          </a:xfrm>
+          <a:prstGeom prst="rect">
+            <a:avLst/>
+          </a:prstGeom>
+          <a:solidFill>
+            <a:srgbClr val="F5F1E7"/>
+          </a:solidFill>
+          <a:ln w="19050">
+            <a:solidFill>
+              <a:srgbClr val="2B6CB0"/>
+            </a:solidFill>
+          </a:ln>
+          <a:effectLst/>
+        </p:spPr>
+        <p:style>
+          <a:lnRef idx="1">
+            <a:schemeClr val="accent1"/>
+          </a:lnRef>
+          <a:fillRef idx="3">
+            <a:schemeClr val="accent1"/>
+          </a:fillRef>
+          <a:effectRef idx="2">
+            <a:schemeClr val="accent1"/>
+          </a:effectRef>
+          <a:fontRef idx="minor">
+            <a:schemeClr val="lt1"/>
+          </a:fontRef>
+        </p:style>
+        <p:txBody>
+          <a:bodyPr rtlCol="0" anchor="ctr"/>
+          <a:lstStyle/>
+          <a:p>
+            <a:pPr algn="ctr"/>
+          </a:p>
+        </p:txBody>
+      </p:sp>
+      <p:sp>
+        <p:nvSpPr>
+          <p:cNvPr id="11" name="TextBox 10"/>
+          <p:cNvSpPr txBox="1"/>
+          <p:nvPr/>
+        </p:nvSpPr>
+        <p:spPr>
+          <a:xfrm>
+            <a:off x="868680" y="2286000"/>
+            <a:ext cx="4937760" cy="365760"/>
+          </a:xfrm>
+          <a:prstGeom prst="rect">
+            <a:avLst/>
+          </a:prstGeom>
+          <a:noFill/>
+        </p:spPr>
+        <p:txBody>
+          <a:bodyPr wrap="none">
+            <a:spAutoFit/>
+          </a:bodyPr>
+          <a:lstStyle/>
+          <a:p>
+            <a:r>
+              <a:rPr sz="1500" b="1">
                 <a:solidFill>
                   <a:srgbClr val="1F2933"/>
                 </a:solidFill>
@@ -8610,14 +10858,32 @@
               <a:t>산출물</a:t>
             </a:r>
           </a:p>
-          <a:p>
-            <a:pPr>
-              <a:spcAft>
-                <a:spcPts val="600"/>
-              </a:spcAft>
-            </a:pPr>
-            <a:r>
-              <a:rPr sz="1300" b="0">
+        </p:txBody>
+      </p:sp>
+      <p:sp>
+        <p:nvSpPr>
+          <p:cNvPr id="12" name="TextBox 11"/>
+          <p:cNvSpPr txBox="1"/>
+          <p:nvPr/>
+        </p:nvSpPr>
+        <p:spPr>
+          <a:xfrm>
+            <a:off x="868680" y="2743200"/>
+            <a:ext cx="4937760" cy="365760"/>
+          </a:xfrm>
+          <a:prstGeom prst="rect">
+            <a:avLst/>
+          </a:prstGeom>
+          <a:noFill/>
+        </p:spPr>
+        <p:txBody>
+          <a:bodyPr wrap="none">
+            <a:spAutoFit/>
+          </a:bodyPr>
+          <a:lstStyle/>
+          <a:p>
+            <a:r>
+              <a:rPr sz="1200" b="0">
                 <a:solidFill>
                   <a:srgbClr val="1F2933"/>
                 </a:solidFill>
@@ -8626,14 +10892,32 @@
               <a:t>• 검증된 스킬 3개</a:t>
             </a:r>
           </a:p>
-          <a:p>
-            <a:pPr>
-              <a:spcAft>
-                <a:spcPts val="600"/>
-              </a:spcAft>
-            </a:pPr>
-            <a:r>
-              <a:rPr sz="1300" b="0">
+        </p:txBody>
+      </p:sp>
+      <p:sp>
+        <p:nvSpPr>
+          <p:cNvPr id="13" name="TextBox 12"/>
+          <p:cNvSpPr txBox="1"/>
+          <p:nvPr/>
+        </p:nvSpPr>
+        <p:spPr>
+          <a:xfrm>
+            <a:off x="868680" y="3163824"/>
+            <a:ext cx="4937760" cy="365760"/>
+          </a:xfrm>
+          <a:prstGeom prst="rect">
+            <a:avLst/>
+          </a:prstGeom>
+          <a:noFill/>
+        </p:spPr>
+        <p:txBody>
+          <a:bodyPr wrap="none">
+            <a:spAutoFit/>
+          </a:bodyPr>
+          <a:lstStyle/>
+          <a:p>
+            <a:r>
+              <a:rPr sz="1200" b="0">
                 <a:solidFill>
                   <a:srgbClr val="1F2933"/>
                 </a:solidFill>
@@ -8642,14 +10926,32 @@
               <a:t>• 역할·승인 기준</a:t>
             </a:r>
           </a:p>
-          <a:p>
-            <a:pPr>
-              <a:spcAft>
-                <a:spcPts val="600"/>
-              </a:spcAft>
-            </a:pPr>
-            <a:r>
-              <a:rPr sz="1300" b="0">
+        </p:txBody>
+      </p:sp>
+      <p:sp>
+        <p:nvSpPr>
+          <p:cNvPr id="14" name="TextBox 13"/>
+          <p:cNvSpPr txBox="1"/>
+          <p:nvPr/>
+        </p:nvSpPr>
+        <p:spPr>
+          <a:xfrm>
+            <a:off x="868680" y="3584448"/>
+            <a:ext cx="4937760" cy="365760"/>
+          </a:xfrm>
+          <a:prstGeom prst="rect">
+            <a:avLst/>
+          </a:prstGeom>
+          <a:noFill/>
+        </p:spPr>
+        <p:txBody>
+          <a:bodyPr wrap="none">
+            <a:spAutoFit/>
+          </a:bodyPr>
+          <a:lstStyle/>
+          <a:p>
+            <a:r>
+              <a:rPr sz="1200" b="0">
                 <a:solidFill>
                   <a:srgbClr val="1F2933"/>
                 </a:solidFill>
@@ -8658,14 +10960,32 @@
               <a:t>• 버전 관리 기준</a:t>
             </a:r>
           </a:p>
-          <a:p>
-            <a:pPr>
-              <a:spcAft>
-                <a:spcPts val="600"/>
-              </a:spcAft>
-            </a:pPr>
-            <a:r>
-              <a:rPr sz="1300" b="0">
+        </p:txBody>
+      </p:sp>
+      <p:sp>
+        <p:nvSpPr>
+          <p:cNvPr id="15" name="TextBox 14"/>
+          <p:cNvSpPr txBox="1"/>
+          <p:nvPr/>
+        </p:nvSpPr>
+        <p:spPr>
+          <a:xfrm>
+            <a:off x="868680" y="4005072"/>
+            <a:ext cx="4937760" cy="365760"/>
+          </a:xfrm>
+          <a:prstGeom prst="rect">
+            <a:avLst/>
+          </a:prstGeom>
+          <a:noFill/>
+        </p:spPr>
+        <p:txBody>
+          <a:bodyPr wrap="none">
+            <a:spAutoFit/>
+          </a:bodyPr>
+          <a:lstStyle/>
+          <a:p>
+            <a:r>
+              <a:rPr sz="1200" b="0">
                 <a:solidFill>
                   <a:srgbClr val="1F2933"/>
                 </a:solidFill>
@@ -8674,14 +10994,32 @@
               <a:t>• 금지 사용 기준</a:t>
             </a:r>
           </a:p>
-          <a:p>
-            <a:pPr>
-              <a:spcAft>
-                <a:spcPts val="600"/>
-              </a:spcAft>
-            </a:pPr>
-            <a:r>
-              <a:rPr sz="1300" b="0">
+        </p:txBody>
+      </p:sp>
+      <p:sp>
+        <p:nvSpPr>
+          <p:cNvPr id="16" name="TextBox 15"/>
+          <p:cNvSpPr txBox="1"/>
+          <p:nvPr/>
+        </p:nvSpPr>
+        <p:spPr>
+          <a:xfrm>
+            <a:off x="868680" y="4425696"/>
+            <a:ext cx="4937760" cy="365760"/>
+          </a:xfrm>
+          <a:prstGeom prst="rect">
+            <a:avLst/>
+          </a:prstGeom>
+          <a:noFill/>
+        </p:spPr>
+        <p:txBody>
+          <a:bodyPr wrap="none">
+            <a:spAutoFit/>
+          </a:bodyPr>
+          <a:lstStyle/>
+          <a:p>
+            <a:r>
+              <a:rPr sz="1200" b="0">
                 <a:solidFill>
                   <a:srgbClr val="1F2933"/>
                 </a:solidFill>
@@ -8690,14 +11028,32 @@
               <a:t>• 분기 검토 일정</a:t>
             </a:r>
           </a:p>
-          <a:p>
-            <a:pPr>
-              <a:spcAft>
-                <a:spcPts val="600"/>
-              </a:spcAft>
-            </a:pPr>
-            <a:r>
-              <a:rPr sz="1300" b="0">
+        </p:txBody>
+      </p:sp>
+      <p:sp>
+        <p:nvSpPr>
+          <p:cNvPr id="17" name="TextBox 16"/>
+          <p:cNvSpPr txBox="1"/>
+          <p:nvPr/>
+        </p:nvSpPr>
+        <p:spPr>
+          <a:xfrm>
+            <a:off x="868680" y="4846320"/>
+            <a:ext cx="4937760" cy="365760"/>
+          </a:xfrm>
+          <a:prstGeom prst="rect">
+            <a:avLst/>
+          </a:prstGeom>
+          <a:noFill/>
+        </p:spPr>
+        <p:txBody>
+          <a:bodyPr wrap="none">
+            <a:spAutoFit/>
+          </a:bodyPr>
+          <a:lstStyle/>
+          <a:p>
+            <a:r>
+              <a:rPr sz="1200" b="0">
                 <a:solidFill>
                   <a:srgbClr val="1F2933"/>
                 </a:solidFill>
@@ -8710,14 +11066,502 @@
       </p:sp>
       <p:sp>
         <p:nvSpPr>
-          <p:cNvPr id="11" name="TextBox 10"/>
-          <p:cNvSpPr txBox="1"/>
-          <p:nvPr/>
-        </p:nvSpPr>
-        <p:spPr>
-          <a:xfrm>
-            <a:off x="6400800" y="2194560"/>
-            <a:ext cx="5212080" cy="2743200"/>
+          <p:cNvPr id="18" name="Rectangle 17"/>
+          <p:cNvSpPr/>
+          <p:nvPr/>
+        </p:nvSpPr>
+        <p:spPr>
+          <a:xfrm>
+            <a:off x="6263640" y="2148840"/>
+            <a:ext cx="5303520" cy="3291840"/>
+          </a:xfrm>
+          <a:prstGeom prst="rect">
+            <a:avLst/>
+          </a:prstGeom>
+          <a:solidFill>
+            <a:srgbClr val="F5F1E7"/>
+          </a:solidFill>
+          <a:ln w="19050">
+            <a:solidFill>
+              <a:srgbClr val="2F855A"/>
+            </a:solidFill>
+          </a:ln>
+          <a:effectLst/>
+        </p:spPr>
+        <p:style>
+          <a:lnRef idx="1">
+            <a:schemeClr val="accent1"/>
+          </a:lnRef>
+          <a:fillRef idx="3">
+            <a:schemeClr val="accent1"/>
+          </a:fillRef>
+          <a:effectRef idx="2">
+            <a:schemeClr val="accent1"/>
+          </a:effectRef>
+          <a:fontRef idx="minor">
+            <a:schemeClr val="lt1"/>
+          </a:fontRef>
+        </p:style>
+        <p:txBody>
+          <a:bodyPr rtlCol="0" anchor="ctr"/>
+          <a:lstStyle/>
+          <a:p>
+            <a:pPr algn="ctr"/>
+          </a:p>
+        </p:txBody>
+      </p:sp>
+      <p:sp>
+        <p:nvSpPr>
+          <p:cNvPr id="19" name="TextBox 18"/>
+          <p:cNvSpPr txBox="1"/>
+          <p:nvPr/>
+        </p:nvSpPr>
+        <p:spPr>
+          <a:xfrm>
+            <a:off x="6492240" y="2286000"/>
+            <a:ext cx="4846320" cy="365760"/>
+          </a:xfrm>
+          <a:prstGeom prst="rect">
+            <a:avLst/>
+          </a:prstGeom>
+          <a:noFill/>
+        </p:spPr>
+        <p:txBody>
+          <a:bodyPr wrap="none">
+            <a:spAutoFit/>
+          </a:bodyPr>
+          <a:lstStyle/>
+          <a:p>
+            <a:r>
+              <a:rPr sz="1500" b="1">
+                <a:solidFill>
+                  <a:srgbClr val="1F2933"/>
+                </a:solidFill>
+                <a:latin typeface="NanumSquareRound"/>
+              </a:rPr>
+              <a:t>실행 흐름</a:t>
+            </a:r>
+          </a:p>
+        </p:txBody>
+      </p:sp>
+      <p:sp>
+        <p:nvSpPr>
+          <p:cNvPr id="20" name="TextBox 19"/>
+          <p:cNvSpPr txBox="1"/>
+          <p:nvPr/>
+        </p:nvSpPr>
+        <p:spPr>
+          <a:xfrm>
+            <a:off x="6492240" y="2743200"/>
+            <a:ext cx="502920" cy="365760"/>
+          </a:xfrm>
+          <a:prstGeom prst="rect">
+            <a:avLst/>
+          </a:prstGeom>
+          <a:noFill/>
+        </p:spPr>
+        <p:txBody>
+          <a:bodyPr wrap="none">
+            <a:spAutoFit/>
+          </a:bodyPr>
+          <a:lstStyle/>
+          <a:p>
+            <a:r>
+              <a:rPr sz="1200" b="1">
+                <a:solidFill>
+                  <a:srgbClr val="2F855A"/>
+                </a:solidFill>
+                <a:latin typeface="NanumSquareRound"/>
+              </a:rPr>
+              <a:t>01</a:t>
+            </a:r>
+          </a:p>
+        </p:txBody>
+      </p:sp>
+      <p:sp>
+        <p:nvSpPr>
+          <p:cNvPr id="21" name="TextBox 20"/>
+          <p:cNvSpPr txBox="1"/>
+          <p:nvPr/>
+        </p:nvSpPr>
+        <p:spPr>
+          <a:xfrm>
+            <a:off x="7040880" y="2743200"/>
+            <a:ext cx="4297680" cy="365760"/>
+          </a:xfrm>
+          <a:prstGeom prst="rect">
+            <a:avLst/>
+          </a:prstGeom>
+          <a:noFill/>
+        </p:spPr>
+        <p:txBody>
+          <a:bodyPr wrap="none">
+            <a:spAutoFit/>
+          </a:bodyPr>
+          <a:lstStyle/>
+          <a:p>
+            <a:r>
+              <a:rPr sz="1200" b="0">
+                <a:solidFill>
+                  <a:srgbClr val="1F2933"/>
+                </a:solidFill>
+                <a:latin typeface="NanumSquareRound"/>
+              </a:rPr>
+              <a:t>반복업무 선정</a:t>
+            </a:r>
+          </a:p>
+        </p:txBody>
+      </p:sp>
+      <p:sp>
+        <p:nvSpPr>
+          <p:cNvPr id="22" name="TextBox 21"/>
+          <p:cNvSpPr txBox="1"/>
+          <p:nvPr/>
+        </p:nvSpPr>
+        <p:spPr>
+          <a:xfrm>
+            <a:off x="6492240" y="3163824"/>
+            <a:ext cx="502920" cy="365760"/>
+          </a:xfrm>
+          <a:prstGeom prst="rect">
+            <a:avLst/>
+          </a:prstGeom>
+          <a:noFill/>
+        </p:spPr>
+        <p:txBody>
+          <a:bodyPr wrap="none">
+            <a:spAutoFit/>
+          </a:bodyPr>
+          <a:lstStyle/>
+          <a:p>
+            <a:r>
+              <a:rPr sz="1200" b="1">
+                <a:solidFill>
+                  <a:srgbClr val="2F855A"/>
+                </a:solidFill>
+                <a:latin typeface="NanumSquareRound"/>
+              </a:rPr>
+              <a:t>02</a:t>
+            </a:r>
+          </a:p>
+        </p:txBody>
+      </p:sp>
+      <p:sp>
+        <p:nvSpPr>
+          <p:cNvPr id="23" name="TextBox 22"/>
+          <p:cNvSpPr txBox="1"/>
+          <p:nvPr/>
+        </p:nvSpPr>
+        <p:spPr>
+          <a:xfrm>
+            <a:off x="7040880" y="3163824"/>
+            <a:ext cx="4297680" cy="365760"/>
+          </a:xfrm>
+          <a:prstGeom prst="rect">
+            <a:avLst/>
+          </a:prstGeom>
+          <a:noFill/>
+        </p:spPr>
+        <p:txBody>
+          <a:bodyPr wrap="none">
+            <a:spAutoFit/>
+          </a:bodyPr>
+          <a:lstStyle/>
+          <a:p>
+            <a:r>
+              <a:rPr sz="1200" b="0">
+                <a:solidFill>
+                  <a:srgbClr val="1F2933"/>
+                </a:solidFill>
+                <a:latin typeface="NanumSquareRound"/>
+              </a:rPr>
+              <a:t>분석·설계</a:t>
+            </a:r>
+          </a:p>
+        </p:txBody>
+      </p:sp>
+      <p:sp>
+        <p:nvSpPr>
+          <p:cNvPr id="24" name="TextBox 23"/>
+          <p:cNvSpPr txBox="1"/>
+          <p:nvPr/>
+        </p:nvSpPr>
+        <p:spPr>
+          <a:xfrm>
+            <a:off x="6492240" y="3584448"/>
+            <a:ext cx="502920" cy="365760"/>
+          </a:xfrm>
+          <a:prstGeom prst="rect">
+            <a:avLst/>
+          </a:prstGeom>
+          <a:noFill/>
+        </p:spPr>
+        <p:txBody>
+          <a:bodyPr wrap="none">
+            <a:spAutoFit/>
+          </a:bodyPr>
+          <a:lstStyle/>
+          <a:p>
+            <a:r>
+              <a:rPr sz="1200" b="1">
+                <a:solidFill>
+                  <a:srgbClr val="2F855A"/>
+                </a:solidFill>
+                <a:latin typeface="NanumSquareRound"/>
+              </a:rPr>
+              <a:t>03</a:t>
+            </a:r>
+          </a:p>
+        </p:txBody>
+      </p:sp>
+      <p:sp>
+        <p:nvSpPr>
+          <p:cNvPr id="25" name="TextBox 24"/>
+          <p:cNvSpPr txBox="1"/>
+          <p:nvPr/>
+        </p:nvSpPr>
+        <p:spPr>
+          <a:xfrm>
+            <a:off x="7040880" y="3584448"/>
+            <a:ext cx="4297680" cy="365760"/>
+          </a:xfrm>
+          <a:prstGeom prst="rect">
+            <a:avLst/>
+          </a:prstGeom>
+          <a:noFill/>
+        </p:spPr>
+        <p:txBody>
+          <a:bodyPr wrap="none">
+            <a:spAutoFit/>
+          </a:bodyPr>
+          <a:lstStyle/>
+          <a:p>
+            <a:r>
+              <a:rPr sz="1200" b="0">
+                <a:solidFill>
+                  <a:srgbClr val="1F2933"/>
+                </a:solidFill>
+                <a:latin typeface="NanumSquareRound"/>
+              </a:rPr>
+              <a:t>합성 실행</a:t>
+            </a:r>
+          </a:p>
+        </p:txBody>
+      </p:sp>
+      <p:sp>
+        <p:nvSpPr>
+          <p:cNvPr id="26" name="TextBox 25"/>
+          <p:cNvSpPr txBox="1"/>
+          <p:nvPr/>
+        </p:nvSpPr>
+        <p:spPr>
+          <a:xfrm>
+            <a:off x="6492240" y="4005072"/>
+            <a:ext cx="502920" cy="365760"/>
+          </a:xfrm>
+          <a:prstGeom prst="rect">
+            <a:avLst/>
+          </a:prstGeom>
+          <a:noFill/>
+        </p:spPr>
+        <p:txBody>
+          <a:bodyPr wrap="none">
+            <a:spAutoFit/>
+          </a:bodyPr>
+          <a:lstStyle/>
+          <a:p>
+            <a:r>
+              <a:rPr sz="1200" b="1">
+                <a:solidFill>
+                  <a:srgbClr val="2F855A"/>
+                </a:solidFill>
+                <a:latin typeface="NanumSquareRound"/>
+              </a:rPr>
+              <a:t>04</a:t>
+            </a:r>
+          </a:p>
+        </p:txBody>
+      </p:sp>
+      <p:sp>
+        <p:nvSpPr>
+          <p:cNvPr id="27" name="TextBox 26"/>
+          <p:cNvSpPr txBox="1"/>
+          <p:nvPr/>
+        </p:nvSpPr>
+        <p:spPr>
+          <a:xfrm>
+            <a:off x="7040880" y="4005072"/>
+            <a:ext cx="4297680" cy="365760"/>
+          </a:xfrm>
+          <a:prstGeom prst="rect">
+            <a:avLst/>
+          </a:prstGeom>
+          <a:noFill/>
+        </p:spPr>
+        <p:txBody>
+          <a:bodyPr wrap="none">
+            <a:spAutoFit/>
+          </a:bodyPr>
+          <a:lstStyle/>
+          <a:p>
+            <a:r>
+              <a:rPr sz="1200" b="0">
+                <a:solidFill>
+                  <a:srgbClr val="1F2933"/>
+                </a:solidFill>
+                <a:latin typeface="NanumSquareRound"/>
+              </a:rPr>
+              <a:t>사람 검토·승인</a:t>
+            </a:r>
+          </a:p>
+        </p:txBody>
+      </p:sp>
+      <p:sp>
+        <p:nvSpPr>
+          <p:cNvPr id="28" name="TextBox 27"/>
+          <p:cNvSpPr txBox="1"/>
+          <p:nvPr/>
+        </p:nvSpPr>
+        <p:spPr>
+          <a:xfrm>
+            <a:off x="6492240" y="4425696"/>
+            <a:ext cx="502920" cy="365760"/>
+          </a:xfrm>
+          <a:prstGeom prst="rect">
+            <a:avLst/>
+          </a:prstGeom>
+          <a:noFill/>
+        </p:spPr>
+        <p:txBody>
+          <a:bodyPr wrap="none">
+            <a:spAutoFit/>
+          </a:bodyPr>
+          <a:lstStyle/>
+          <a:p>
+            <a:r>
+              <a:rPr sz="1200" b="1">
+                <a:solidFill>
+                  <a:srgbClr val="2F855A"/>
+                </a:solidFill>
+                <a:latin typeface="NanumSquareRound"/>
+              </a:rPr>
+              <a:t>05</a:t>
+            </a:r>
+          </a:p>
+        </p:txBody>
+      </p:sp>
+      <p:sp>
+        <p:nvSpPr>
+          <p:cNvPr id="29" name="TextBox 28"/>
+          <p:cNvSpPr txBox="1"/>
+          <p:nvPr/>
+        </p:nvSpPr>
+        <p:spPr>
+          <a:xfrm>
+            <a:off x="7040880" y="4425696"/>
+            <a:ext cx="4297680" cy="365760"/>
+          </a:xfrm>
+          <a:prstGeom prst="rect">
+            <a:avLst/>
+          </a:prstGeom>
+          <a:noFill/>
+        </p:spPr>
+        <p:txBody>
+          <a:bodyPr wrap="none">
+            <a:spAutoFit/>
+          </a:bodyPr>
+          <a:lstStyle/>
+          <a:p>
+            <a:r>
+              <a:rPr sz="1200" b="0">
+                <a:solidFill>
+                  <a:srgbClr val="1F2933"/>
+                </a:solidFill>
+                <a:latin typeface="NanumSquareRound"/>
+              </a:rPr>
+              <a:t>스킬 카드 납품</a:t>
+            </a:r>
+          </a:p>
+        </p:txBody>
+      </p:sp>
+      <p:sp>
+        <p:nvSpPr>
+          <p:cNvPr id="30" name="TextBox 29"/>
+          <p:cNvSpPr txBox="1"/>
+          <p:nvPr/>
+        </p:nvSpPr>
+        <p:spPr>
+          <a:xfrm>
+            <a:off x="6492240" y="4846320"/>
+            <a:ext cx="502920" cy="365760"/>
+          </a:xfrm>
+          <a:prstGeom prst="rect">
+            <a:avLst/>
+          </a:prstGeom>
+          <a:noFill/>
+        </p:spPr>
+        <p:txBody>
+          <a:bodyPr wrap="none">
+            <a:spAutoFit/>
+          </a:bodyPr>
+          <a:lstStyle/>
+          <a:p>
+            <a:r>
+              <a:rPr sz="1200" b="1">
+                <a:solidFill>
+                  <a:srgbClr val="2F855A"/>
+                </a:solidFill>
+                <a:latin typeface="NanumSquareRound"/>
+              </a:rPr>
+              <a:t>06</a:t>
+            </a:r>
+          </a:p>
+        </p:txBody>
+      </p:sp>
+      <p:sp>
+        <p:nvSpPr>
+          <p:cNvPr id="31" name="TextBox 30"/>
+          <p:cNvSpPr txBox="1"/>
+          <p:nvPr/>
+        </p:nvSpPr>
+        <p:spPr>
+          <a:xfrm>
+            <a:off x="7040880" y="4846320"/>
+            <a:ext cx="4297680" cy="365760"/>
+          </a:xfrm>
+          <a:prstGeom prst="rect">
+            <a:avLst/>
+          </a:prstGeom>
+          <a:noFill/>
+        </p:spPr>
+        <p:txBody>
+          <a:bodyPr wrap="none">
+            <a:spAutoFit/>
+          </a:bodyPr>
+          <a:lstStyle/>
+          <a:p>
+            <a:r>
+              <a:rPr sz="1200" b="0">
+                <a:solidFill>
+                  <a:srgbClr val="1F2933"/>
+                </a:solidFill>
+                <a:latin typeface="NanumSquareRound"/>
+              </a:rPr>
+              <a:t>분기 검토·버전 갱신</a:t>
+            </a:r>
+          </a:p>
+        </p:txBody>
+      </p:sp>
+      <p:sp>
+        <p:nvSpPr>
+          <p:cNvPr id="32" name="TextBox 31"/>
+          <p:cNvSpPr txBox="1"/>
+          <p:nvPr/>
+        </p:nvSpPr>
+        <p:spPr>
+          <a:xfrm>
+            <a:off x="640080" y="5623560"/>
+            <a:ext cx="10972800" cy="640080"/>
           </a:xfrm>
           <a:prstGeom prst="rect">
             <a:avLst/>
@@ -8943,14 +11787,94 @@
       </p:sp>
       <p:sp>
         <p:nvSpPr>
-          <p:cNvPr id="7" name="TextBox 6"/>
-          <p:cNvSpPr txBox="1"/>
-          <p:nvPr/>
-        </p:nvSpPr>
-        <p:spPr>
-          <a:xfrm>
-            <a:off x="548640" y="1234440"/>
-            <a:ext cx="5486400" cy="4023360"/>
+          <p:cNvPr id="7" name="Rectangle 6"/>
+          <p:cNvSpPr/>
+          <p:nvPr/>
+        </p:nvSpPr>
+        <p:spPr>
+          <a:xfrm>
+            <a:off x="548640" y="1325880"/>
+            <a:ext cx="5394960" cy="2286000"/>
+          </a:xfrm>
+          <a:prstGeom prst="rect">
+            <a:avLst/>
+          </a:prstGeom>
+          <a:solidFill>
+            <a:srgbClr val="F5F1E7"/>
+          </a:solidFill>
+          <a:ln w="19050">
+            <a:solidFill>
+              <a:srgbClr val="C53030"/>
+            </a:solidFill>
+          </a:ln>
+          <a:effectLst/>
+        </p:spPr>
+        <p:style>
+          <a:lnRef idx="1">
+            <a:schemeClr val="accent1"/>
+          </a:lnRef>
+          <a:fillRef idx="3">
+            <a:schemeClr val="accent1"/>
+          </a:fillRef>
+          <a:effectRef idx="2">
+            <a:schemeClr val="accent1"/>
+          </a:effectRef>
+          <a:fontRef idx="minor">
+            <a:schemeClr val="lt1"/>
+          </a:fontRef>
+        </p:style>
+        <p:txBody>
+          <a:bodyPr rtlCol="0" anchor="ctr"/>
+          <a:lstStyle/>
+          <a:p>
+            <a:pPr algn="ctr"/>
+          </a:p>
+        </p:txBody>
+      </p:sp>
+      <p:sp>
+        <p:nvSpPr>
+          <p:cNvPr id="8" name="TextBox 7"/>
+          <p:cNvSpPr txBox="1"/>
+          <p:nvPr/>
+        </p:nvSpPr>
+        <p:spPr>
+          <a:xfrm>
+            <a:off x="777240" y="1463039"/>
+            <a:ext cx="4937760" cy="365760"/>
+          </a:xfrm>
+          <a:prstGeom prst="rect">
+            <a:avLst/>
+          </a:prstGeom>
+          <a:noFill/>
+        </p:spPr>
+        <p:txBody>
+          <a:bodyPr wrap="none">
+            <a:spAutoFit/>
+          </a:bodyPr>
+          <a:lstStyle/>
+          <a:p>
+            <a:r>
+              <a:rPr sz="1400" b="1">
+                <a:solidFill>
+                  <a:srgbClr val="C53030"/>
+                </a:solidFill>
+                <a:latin typeface="NanumSquareRound"/>
+              </a:rPr>
+              <a:t>가격 가설 (시장 검증 전)</a:t>
+            </a:r>
+          </a:p>
+        </p:txBody>
+      </p:sp>
+      <p:sp>
+        <p:nvSpPr>
+          <p:cNvPr id="9" name="TextBox 8"/>
+          <p:cNvSpPr txBox="1"/>
+          <p:nvPr/>
+        </p:nvSpPr>
+        <p:spPr>
+          <a:xfrm>
+            <a:off x="777240" y="1874519"/>
+            <a:ext cx="4937760" cy="1645920"/>
           </a:xfrm>
           <a:prstGeom prst="rect">
             <a:avLst/>
@@ -8969,13 +11893,13 @@
               </a:spcAft>
             </a:pPr>
             <a:r>
-              <a:rPr sz="1400" b="0">
+              <a:rPr sz="1200" b="0">
                 <a:solidFill>
                   <a:srgbClr val="1F2933"/>
                 </a:solidFill>
                 <a:latin typeface="NanumSquareRound"/>
               </a:rPr>
-              <a:t>Offer A (1~2일): 300만~500만원 — 가격 가설</a:t>
+              <a:t>Offer A (1~2일): 300만~500만원</a:t>
             </a:r>
           </a:p>
           <a:p>
@@ -8985,13 +11909,13 @@
               </a:spcAft>
             </a:pPr>
             <a:r>
-              <a:rPr sz="1400" b="0">
+              <a:rPr sz="1200" b="0">
                 <a:solidFill>
                   <a:srgbClr val="1F2933"/>
                 </a:solidFill>
                 <a:latin typeface="NanumSquareRound"/>
               </a:rPr>
-              <a:t>Offer B (2~3주): 500만~800만원 — 가격 가설</a:t>
+              <a:t>Offer B (2~3주): 500만~800만원</a:t>
             </a:r>
           </a:p>
           <a:p>
@@ -9001,13 +11925,13 @@
               </a:spcAft>
             </a:pPr>
             <a:r>
-              <a:rPr sz="1400" b="0">
+              <a:rPr sz="1200" b="0">
                 <a:solidFill>
                   <a:srgbClr val="1F2933"/>
                 </a:solidFill>
                 <a:latin typeface="NanumSquareRound"/>
               </a:rPr>
-              <a:t>Offer C (4~6주): 1,200만~2,000만원 — 가격 가설</a:t>
+              <a:t>Offer C (4~6주): 1,200만~2,000만원</a:t>
             </a:r>
           </a:p>
           <a:p>
@@ -9017,7 +11941,7 @@
               </a:spcAft>
             </a:pPr>
             <a:r>
-              <a:rPr sz="1400" b="0">
+              <a:rPr sz="1200" b="0">
                 <a:solidFill>
                   <a:srgbClr val="1F2933"/>
                 </a:solidFill>
@@ -9030,14 +11954,94 @@
       </p:sp>
       <p:sp>
         <p:nvSpPr>
-          <p:cNvPr id="8" name="TextBox 7"/>
-          <p:cNvSpPr txBox="1"/>
-          <p:nvPr/>
-        </p:nvSpPr>
-        <p:spPr>
-          <a:xfrm>
-            <a:off x="6400800" y="1234440"/>
-            <a:ext cx="5212080" cy="4023360"/>
+          <p:cNvPr id="10" name="Rectangle 9"/>
+          <p:cNvSpPr/>
+          <p:nvPr/>
+        </p:nvSpPr>
+        <p:spPr>
+          <a:xfrm>
+            <a:off x="6217920" y="1325880"/>
+            <a:ext cx="5394960" cy="2286000"/>
+          </a:xfrm>
+          <a:prstGeom prst="rect">
+            <a:avLst/>
+          </a:prstGeom>
+          <a:solidFill>
+            <a:srgbClr val="F5F1E7"/>
+          </a:solidFill>
+          <a:ln w="19050">
+            <a:solidFill>
+              <a:srgbClr val="2B6CB0"/>
+            </a:solidFill>
+          </a:ln>
+          <a:effectLst/>
+        </p:spPr>
+        <p:style>
+          <a:lnRef idx="1">
+            <a:schemeClr val="accent1"/>
+          </a:lnRef>
+          <a:fillRef idx="3">
+            <a:schemeClr val="accent1"/>
+          </a:fillRef>
+          <a:effectRef idx="2">
+            <a:schemeClr val="accent1"/>
+          </a:effectRef>
+          <a:fontRef idx="minor">
+            <a:schemeClr val="lt1"/>
+          </a:fontRef>
+        </p:style>
+        <p:txBody>
+          <a:bodyPr rtlCol="0" anchor="ctr"/>
+          <a:lstStyle/>
+          <a:p>
+            <a:pPr algn="ctr"/>
+          </a:p>
+        </p:txBody>
+      </p:sp>
+      <p:sp>
+        <p:nvSpPr>
+          <p:cNvPr id="11" name="TextBox 10"/>
+          <p:cNvSpPr txBox="1"/>
+          <p:nvPr/>
+        </p:nvSpPr>
+        <p:spPr>
+          <a:xfrm>
+            <a:off x="6446520" y="1463039"/>
+            <a:ext cx="4937760" cy="365760"/>
+          </a:xfrm>
+          <a:prstGeom prst="rect">
+            <a:avLst/>
+          </a:prstGeom>
+          <a:noFill/>
+        </p:spPr>
+        <p:txBody>
+          <a:bodyPr wrap="none">
+            <a:spAutoFit/>
+          </a:bodyPr>
+          <a:lstStyle/>
+          <a:p>
+            <a:r>
+              <a:rPr sz="1400" b="1">
+                <a:solidFill>
+                  <a:srgbClr val="2B6CB0"/>
+                </a:solidFill>
+                <a:latin typeface="NanumSquareRound"/>
+              </a:rPr>
+              <a:t>적합 고객</a:t>
+            </a:r>
+          </a:p>
+        </p:txBody>
+      </p:sp>
+      <p:sp>
+        <p:nvSpPr>
+          <p:cNvPr id="12" name="TextBox 11"/>
+          <p:cNvSpPr txBox="1"/>
+          <p:nvPr/>
+        </p:nvSpPr>
+        <p:spPr>
+          <a:xfrm>
+            <a:off x="6446520" y="1874519"/>
+            <a:ext cx="4937760" cy="1645920"/>
           </a:xfrm>
           <a:prstGeom prst="rect">
             <a:avLst/>
@@ -9056,13 +12060,13 @@
               </a:spcAft>
             </a:pPr>
             <a:r>
-              <a:rPr sz="1300" b="0">
+              <a:rPr sz="1200" b="0">
                 <a:solidFill>
                   <a:srgbClr val="1F2933"/>
                 </a:solidFill>
                 <a:latin typeface="NanumSquareRound"/>
               </a:rPr>
-              <a:t>적합: 반복업무 주 1회 이상, 검토·승인자 존재, 업무 1개 파일럿 가능</a:t>
+              <a:t>반복업무가 주 1회 이상 반복되는 조직</a:t>
             </a:r>
           </a:p>
           <a:p>
@@ -9072,13 +12076,13 @@
               </a:spcAft>
             </a:pPr>
             <a:r>
-              <a:rPr sz="1300" b="0">
+              <a:rPr sz="1200" b="0">
                 <a:solidFill>
                   <a:srgbClr val="1F2933"/>
                 </a:solidFill>
                 <a:latin typeface="NanumSquareRound"/>
               </a:rPr>
-              <a:t>비적합: 전사 자동화 요구, 사람 검토 배제, 성과 보장 요구</a:t>
+              <a:t>검토·승인자가 존재하는 조직</a:t>
             </a:r>
           </a:p>
           <a:p>
@@ -9088,15 +12092,118 @@
               </a:spcAft>
             </a:pPr>
             <a:r>
-              <a:rPr sz="1300" b="0">
+              <a:rPr sz="1200" b="0">
                 <a:solidFill>
                   <a:srgbClr val="1F2933"/>
                 </a:solidFill>
                 <a:latin typeface="NanumSquareRound"/>
               </a:rPr>
-              <a:t>경계: 정확성 보장·오류 없음·직원 대체 표현 금지</a:t>
-            </a:r>
-          </a:p>
+              <a:t>업무 1개 파일럿부터 시작 가능한 조직</a:t>
+            </a:r>
+          </a:p>
+        </p:txBody>
+      </p:sp>
+      <p:sp>
+        <p:nvSpPr>
+          <p:cNvPr id="13" name="Rectangle 12"/>
+          <p:cNvSpPr/>
+          <p:nvPr/>
+        </p:nvSpPr>
+        <p:spPr>
+          <a:xfrm>
+            <a:off x="548640" y="3794760"/>
+            <a:ext cx="5394960" cy="2286000"/>
+          </a:xfrm>
+          <a:prstGeom prst="rect">
+            <a:avLst/>
+          </a:prstGeom>
+          <a:solidFill>
+            <a:srgbClr val="F5F1E7"/>
+          </a:solidFill>
+          <a:ln w="19050">
+            <a:solidFill>
+              <a:srgbClr val="C05621"/>
+            </a:solidFill>
+          </a:ln>
+          <a:effectLst/>
+        </p:spPr>
+        <p:style>
+          <a:lnRef idx="1">
+            <a:schemeClr val="accent1"/>
+          </a:lnRef>
+          <a:fillRef idx="3">
+            <a:schemeClr val="accent1"/>
+          </a:fillRef>
+          <a:effectRef idx="2">
+            <a:schemeClr val="accent1"/>
+          </a:effectRef>
+          <a:fontRef idx="minor">
+            <a:schemeClr val="lt1"/>
+          </a:fontRef>
+        </p:style>
+        <p:txBody>
+          <a:bodyPr rtlCol="0" anchor="ctr"/>
+          <a:lstStyle/>
+          <a:p>
+            <a:pPr algn="ctr"/>
+          </a:p>
+        </p:txBody>
+      </p:sp>
+      <p:sp>
+        <p:nvSpPr>
+          <p:cNvPr id="14" name="TextBox 13"/>
+          <p:cNvSpPr txBox="1"/>
+          <p:nvPr/>
+        </p:nvSpPr>
+        <p:spPr>
+          <a:xfrm>
+            <a:off x="777240" y="3931920"/>
+            <a:ext cx="4937760" cy="365760"/>
+          </a:xfrm>
+          <a:prstGeom prst="rect">
+            <a:avLst/>
+          </a:prstGeom>
+          <a:noFill/>
+        </p:spPr>
+        <p:txBody>
+          <a:bodyPr wrap="none">
+            <a:spAutoFit/>
+          </a:bodyPr>
+          <a:lstStyle/>
+          <a:p>
+            <a:r>
+              <a:rPr sz="1400" b="1">
+                <a:solidFill>
+                  <a:srgbClr val="C05621"/>
+                </a:solidFill>
+                <a:latin typeface="NanumSquareRound"/>
+              </a:rPr>
+              <a:t>비적합 고객</a:t>
+            </a:r>
+          </a:p>
+        </p:txBody>
+      </p:sp>
+      <p:sp>
+        <p:nvSpPr>
+          <p:cNvPr id="15" name="TextBox 14"/>
+          <p:cNvSpPr txBox="1"/>
+          <p:nvPr/>
+        </p:nvSpPr>
+        <p:spPr>
+          <a:xfrm>
+            <a:off x="777240" y="4343400"/>
+            <a:ext cx="4937760" cy="1645920"/>
+          </a:xfrm>
+          <a:prstGeom prst="rect">
+            <a:avLst/>
+          </a:prstGeom>
+          <a:noFill/>
+        </p:spPr>
+        <p:txBody>
+          <a:bodyPr wrap="square">
+            <a:spAutoFit/>
+          </a:bodyPr>
+          <a:lstStyle/>
           <a:p>
             <a:pPr>
               <a:spcAft>
@@ -9104,13 +12211,196 @@
               </a:spcAft>
             </a:pPr>
             <a:r>
-              <a:rPr sz="1300" b="0">
+              <a:rPr sz="1200" b="0">
                 <a:solidFill>
                   <a:srgbClr val="1F2933"/>
                 </a:solidFill>
                 <a:latin typeface="NanumSquareRound"/>
               </a:rPr>
-              <a:t>사람 검토와 승인을 포함하며, 파일럿 결과에 따라 확대 여부 결정</a:t>
+              <a:t>전사 자동화를 한 번에 요구하는 경우</a:t>
+            </a:r>
+          </a:p>
+          <a:p>
+            <a:pPr>
+              <a:spcAft>
+                <a:spcPts val="800"/>
+              </a:spcAft>
+            </a:pPr>
+            <a:r>
+              <a:rPr sz="1200" b="0">
+                <a:solidFill>
+                  <a:srgbClr val="1F2933"/>
+                </a:solidFill>
+                <a:latin typeface="NanumSquareRound"/>
+              </a:rPr>
+              <a:t>사람 검토를 배제하려는 경우</a:t>
+            </a:r>
+          </a:p>
+          <a:p>
+            <a:pPr>
+              <a:spcAft>
+                <a:spcPts val="800"/>
+              </a:spcAft>
+            </a:pPr>
+            <a:r>
+              <a:rPr sz="1200" b="0">
+                <a:solidFill>
+                  <a:srgbClr val="1F2933"/>
+                </a:solidFill>
+                <a:latin typeface="NanumSquareRound"/>
+              </a:rPr>
+              <a:t>성과(수익) 보장을 요구하는 경우</a:t>
+            </a:r>
+          </a:p>
+        </p:txBody>
+      </p:sp>
+      <p:sp>
+        <p:nvSpPr>
+          <p:cNvPr id="16" name="Rectangle 15"/>
+          <p:cNvSpPr/>
+          <p:nvPr/>
+        </p:nvSpPr>
+        <p:spPr>
+          <a:xfrm>
+            <a:off x="6217920" y="3794760"/>
+            <a:ext cx="5394960" cy="2286000"/>
+          </a:xfrm>
+          <a:prstGeom prst="rect">
+            <a:avLst/>
+          </a:prstGeom>
+          <a:solidFill>
+            <a:srgbClr val="F5F1E7"/>
+          </a:solidFill>
+          <a:ln w="19050">
+            <a:solidFill>
+              <a:srgbClr val="B7791F"/>
+            </a:solidFill>
+          </a:ln>
+          <a:effectLst/>
+        </p:spPr>
+        <p:style>
+          <a:lnRef idx="1">
+            <a:schemeClr val="accent1"/>
+          </a:lnRef>
+          <a:fillRef idx="3">
+            <a:schemeClr val="accent1"/>
+          </a:fillRef>
+          <a:effectRef idx="2">
+            <a:schemeClr val="accent1"/>
+          </a:effectRef>
+          <a:fontRef idx="minor">
+            <a:schemeClr val="lt1"/>
+          </a:fontRef>
+        </p:style>
+        <p:txBody>
+          <a:bodyPr rtlCol="0" anchor="ctr"/>
+          <a:lstStyle/>
+          <a:p>
+            <a:pPr algn="ctr"/>
+          </a:p>
+        </p:txBody>
+      </p:sp>
+      <p:sp>
+        <p:nvSpPr>
+          <p:cNvPr id="17" name="TextBox 16"/>
+          <p:cNvSpPr txBox="1"/>
+          <p:nvPr/>
+        </p:nvSpPr>
+        <p:spPr>
+          <a:xfrm>
+            <a:off x="6446520" y="3931920"/>
+            <a:ext cx="4937760" cy="365760"/>
+          </a:xfrm>
+          <a:prstGeom prst="rect">
+            <a:avLst/>
+          </a:prstGeom>
+          <a:noFill/>
+        </p:spPr>
+        <p:txBody>
+          <a:bodyPr wrap="none">
+            <a:spAutoFit/>
+          </a:bodyPr>
+          <a:lstStyle/>
+          <a:p>
+            <a:r>
+              <a:rPr sz="1400" b="1">
+                <a:solidFill>
+                  <a:srgbClr val="B7791F"/>
+                </a:solidFill>
+                <a:latin typeface="NanumSquareRound"/>
+              </a:rPr>
+              <a:t>위험 경계</a:t>
+            </a:r>
+          </a:p>
+        </p:txBody>
+      </p:sp>
+      <p:sp>
+        <p:nvSpPr>
+          <p:cNvPr id="18" name="TextBox 17"/>
+          <p:cNvSpPr txBox="1"/>
+          <p:nvPr/>
+        </p:nvSpPr>
+        <p:spPr>
+          <a:xfrm>
+            <a:off x="6446520" y="4343400"/>
+            <a:ext cx="4937760" cy="1645920"/>
+          </a:xfrm>
+          <a:prstGeom prst="rect">
+            <a:avLst/>
+          </a:prstGeom>
+          <a:noFill/>
+        </p:spPr>
+        <p:txBody>
+          <a:bodyPr wrap="square">
+            <a:spAutoFit/>
+          </a:bodyPr>
+          <a:lstStyle/>
+          <a:p>
+            <a:pPr>
+              <a:spcAft>
+                <a:spcPts val="800"/>
+              </a:spcAft>
+            </a:pPr>
+            <a:r>
+              <a:rPr sz="1200" b="0">
+                <a:solidFill>
+                  <a:srgbClr val="1F2933"/>
+                </a:solidFill>
+                <a:latin typeface="NanumSquareRound"/>
+              </a:rPr>
+              <a:t>정확성 보장·오류 없음·직원 대체 표현 금지</a:t>
+            </a:r>
+          </a:p>
+          <a:p>
+            <a:pPr>
+              <a:spcAft>
+                <a:spcPts val="800"/>
+              </a:spcAft>
+            </a:pPr>
+            <a:r>
+              <a:rPr sz="1200" b="0">
+                <a:solidFill>
+                  <a:srgbClr val="1F2933"/>
+                </a:solidFill>
+                <a:latin typeface="NanumSquareRound"/>
+              </a:rPr>
+              <a:t>사람 검토와 승인을 항상 포함</a:t>
+            </a:r>
+          </a:p>
+          <a:p>
+            <a:pPr>
+              <a:spcAft>
+                <a:spcPts val="800"/>
+              </a:spcAft>
+            </a:pPr>
+            <a:r>
+              <a:rPr sz="1200" b="0">
+                <a:solidFill>
+                  <a:srgbClr val="1F2933"/>
+                </a:solidFill>
+                <a:latin typeface="NanumSquareRound"/>
+              </a:rPr>
+              <a:t>파일럿 결과에 따라 확대 여부 결정</a:t>
             </a:r>
           </a:p>
         </p:txBody>

--- a/docs/commercial/business-32-ai-skill-studio/customer-package/Business32_Master_Proposal_10p.pptx
+++ b/docs/commercial/business-32-ai-skill-studio/customer-package/Business32_Master_Proposal_10p.pptx
@@ -8337,7 +8337,7 @@
         <p:spPr>
           <a:xfrm>
             <a:off x="868680" y="2743200"/>
-            <a:ext cx="4937760" cy="365760"/>
+            <a:ext cx="2468880" cy="457200"/>
           </a:xfrm>
           <a:prstGeom prst="rect">
             <a:avLst/>
@@ -8370,8 +8370,8 @@
         </p:nvSpPr>
         <p:spPr>
           <a:xfrm>
-            <a:off x="868680" y="3163824"/>
-            <a:ext cx="4937760" cy="365760"/>
+            <a:off x="868680" y="3246120"/>
+            <a:ext cx="2468880" cy="457200"/>
           </a:xfrm>
           <a:prstGeom prst="rect">
             <a:avLst/>
@@ -8404,8 +8404,8 @@
         </p:nvSpPr>
         <p:spPr>
           <a:xfrm>
-            <a:off x="868680" y="3584448"/>
-            <a:ext cx="4937760" cy="365760"/>
+            <a:off x="868680" y="3749039"/>
+            <a:ext cx="2468880" cy="457200"/>
           </a:xfrm>
           <a:prstGeom prst="rect">
             <a:avLst/>
@@ -8438,8 +8438,8 @@
         </p:nvSpPr>
         <p:spPr>
           <a:xfrm>
-            <a:off x="868680" y="4005072"/>
-            <a:ext cx="4937760" cy="365760"/>
+            <a:off x="868680" y="4251960"/>
+            <a:ext cx="2468880" cy="457200"/>
           </a:xfrm>
           <a:prstGeom prst="rect">
             <a:avLst/>
@@ -8472,8 +8472,8 @@
         </p:nvSpPr>
         <p:spPr>
           <a:xfrm>
-            <a:off x="868680" y="4425696"/>
-            <a:ext cx="4937760" cy="365760"/>
+            <a:off x="868680" y="4754880"/>
+            <a:ext cx="2468880" cy="457200"/>
           </a:xfrm>
           <a:prstGeom prst="rect">
             <a:avLst/>
@@ -8506,8 +8506,8 @@
         </p:nvSpPr>
         <p:spPr>
           <a:xfrm>
-            <a:off x="868680" y="4846320"/>
-            <a:ext cx="4937760" cy="365760"/>
+            <a:off x="3520439" y="2743200"/>
+            <a:ext cx="2468880" cy="457200"/>
           </a:xfrm>
           <a:prstGeom prst="rect">
             <a:avLst/>
@@ -8540,8 +8540,8 @@
         </p:nvSpPr>
         <p:spPr>
           <a:xfrm>
-            <a:off x="868680" y="5266944"/>
-            <a:ext cx="4937760" cy="365760"/>
+            <a:off x="3520439" y="3246120"/>
+            <a:ext cx="2468880" cy="457200"/>
           </a:xfrm>
           <a:prstGeom prst="rect">
             <a:avLst/>
@@ -8574,8 +8574,8 @@
         </p:nvSpPr>
         <p:spPr>
           <a:xfrm>
-            <a:off x="868680" y="5687568"/>
-            <a:ext cx="4937760" cy="365760"/>
+            <a:off x="3520439" y="3749039"/>
+            <a:ext cx="2468880" cy="457200"/>
           </a:xfrm>
           <a:prstGeom prst="rect">
             <a:avLst/>
@@ -8608,8 +8608,8 @@
         </p:nvSpPr>
         <p:spPr>
           <a:xfrm>
-            <a:off x="868680" y="6108192"/>
-            <a:ext cx="4937760" cy="365760"/>
+            <a:off x="3520439" y="4251960"/>
+            <a:ext cx="2468880" cy="457200"/>
           </a:xfrm>
           <a:prstGeom prst="rect">
             <a:avLst/>
@@ -9603,7 +9603,7 @@
         <p:spPr>
           <a:xfrm>
             <a:off x="868680" y="2743200"/>
-            <a:ext cx="4937760" cy="365760"/>
+            <a:ext cx="2468880" cy="457200"/>
           </a:xfrm>
           <a:prstGeom prst="rect">
             <a:avLst/>
@@ -9636,8 +9636,8 @@
         </p:nvSpPr>
         <p:spPr>
           <a:xfrm>
-            <a:off x="868680" y="3163824"/>
-            <a:ext cx="4937760" cy="365760"/>
+            <a:off x="868680" y="3246120"/>
+            <a:ext cx="2468880" cy="457200"/>
           </a:xfrm>
           <a:prstGeom prst="rect">
             <a:avLst/>
@@ -9670,8 +9670,8 @@
         </p:nvSpPr>
         <p:spPr>
           <a:xfrm>
-            <a:off x="868680" y="3584448"/>
-            <a:ext cx="4937760" cy="365760"/>
+            <a:off x="868680" y="3749039"/>
+            <a:ext cx="2468880" cy="457200"/>
           </a:xfrm>
           <a:prstGeom prst="rect">
             <a:avLst/>
@@ -9704,8 +9704,8 @@
         </p:nvSpPr>
         <p:spPr>
           <a:xfrm>
-            <a:off x="868680" y="4005072"/>
-            <a:ext cx="4937760" cy="365760"/>
+            <a:off x="868680" y="4251960"/>
+            <a:ext cx="2468880" cy="457200"/>
           </a:xfrm>
           <a:prstGeom prst="rect">
             <a:avLst/>
@@ -9738,8 +9738,8 @@
         </p:nvSpPr>
         <p:spPr>
           <a:xfrm>
-            <a:off x="868680" y="4425696"/>
-            <a:ext cx="4937760" cy="365760"/>
+            <a:off x="868680" y="4754880"/>
+            <a:ext cx="2468880" cy="457200"/>
           </a:xfrm>
           <a:prstGeom prst="rect">
             <a:avLst/>
@@ -9772,8 +9772,8 @@
         </p:nvSpPr>
         <p:spPr>
           <a:xfrm>
-            <a:off x="868680" y="4846320"/>
-            <a:ext cx="4937760" cy="365760"/>
+            <a:off x="3520439" y="2743200"/>
+            <a:ext cx="2468880" cy="457200"/>
           </a:xfrm>
           <a:prstGeom prst="rect">
             <a:avLst/>
@@ -9806,8 +9806,8 @@
         </p:nvSpPr>
         <p:spPr>
           <a:xfrm>
-            <a:off x="868680" y="5266944"/>
-            <a:ext cx="4937760" cy="365760"/>
+            <a:off x="3520439" y="3246120"/>
+            <a:ext cx="2468880" cy="457200"/>
           </a:xfrm>
           <a:prstGeom prst="rect">
             <a:avLst/>
@@ -9840,8 +9840,8 @@
         </p:nvSpPr>
         <p:spPr>
           <a:xfrm>
-            <a:off x="868680" y="5687568"/>
-            <a:ext cx="4937760" cy="365760"/>
+            <a:off x="3520439" y="3749039"/>
+            <a:ext cx="2468880" cy="457200"/>
           </a:xfrm>
           <a:prstGeom prst="rect">
             <a:avLst/>
@@ -9874,8 +9874,8 @@
         </p:nvSpPr>
         <p:spPr>
           <a:xfrm>
-            <a:off x="868680" y="6108192"/>
-            <a:ext cx="4937760" cy="365760"/>
+            <a:off x="3520439" y="4251960"/>
+            <a:ext cx="2468880" cy="457200"/>
           </a:xfrm>
           <a:prstGeom prst="rect">
             <a:avLst/>
